--- a/docs/sample-proposal-navy-sttr/Aerivio_Navy_STTR_Company_Overview.pptx
+++ b/docs/sample-proposal-navy-sttr/Aerivio_Navy_STTR_Company_Overview.pptx
@@ -1655,6 +1655,13 @@
 <file path=ppt/slides/slide1.xml><?xml version="1.0" encoding="utf-8"?>
 <p:sld xmlns:a="http://schemas.openxmlformats.org/drawingml/2006/main" xmlns:r="http://schemas.openxmlformats.org/officeDocument/2006/relationships" xmlns:p="http://schemas.openxmlformats.org/presentationml/2006/main">
   <p:cSld name="Slide 1">
+    <p:bg>
+      <p:bgPr>
+        <a:solidFill>
+          <a:srgbClr val="FFFFFF"/>
+        </a:solidFill>
+      </p:bgPr>
+    </p:bg>
     <p:spTree>
       <p:nvGrpSpPr>
         <p:cNvPr id="1" name=""/>
@@ -1671,14 +1678,34 @@
       </p:grpSpPr>
       <p:sp>
         <p:nvSpPr>
-          <p:cNvPr id="2" name="Text 0"/>
-          <p:cNvSpPr/>
-          <p:nvPr/>
-        </p:nvSpPr>
-        <p:spPr>
-          <a:xfrm>
-            <a:off x="457200" y="274320"/>
-            <a:ext cx="11274552" cy="914400"/>
+          <p:cNvPr id="2" name="Shape 0"/>
+          <p:cNvSpPr/>
+          <p:nvPr/>
+        </p:nvSpPr>
+        <p:spPr>
+          <a:xfrm>
+            <a:off x="0" y="0"/>
+            <a:ext cx="12188952" cy="2286000"/>
+          </a:xfrm>
+          <a:prstGeom prst="rect">
+            <a:avLst/>
+          </a:prstGeom>
+          <a:solidFill>
+            <a:srgbClr val="0F2942"/>
+          </a:solidFill>
+          <a:ln/>
+        </p:spPr>
+      </p:sp>
+      <p:sp>
+        <p:nvSpPr>
+          <p:cNvPr id="3" name="Text 1"/>
+          <p:cNvSpPr/>
+          <p:nvPr/>
+        </p:nvSpPr>
+        <p:spPr>
+          <a:xfrm>
+            <a:off x="548640" y="640080"/>
+            <a:ext cx="11091672" cy="1097280"/>
           </a:xfrm>
           <a:prstGeom prst="rect">
             <a:avLst/>
@@ -1687,16 +1714,16 @@
           <a:ln/>
         </p:spPr>
         <p:txBody>
-          <a:bodyPr wrap="square" rtlCol="0" anchor="b"/>
+          <a:bodyPr wrap="square" rtlCol="0" anchor="ctr"/>
           <a:lstStyle/>
           <a:p>
             <a:pPr indent="0" marL="0">
               <a:buNone/>
             </a:pPr>
             <a:r>
-              <a:rPr lang="en-US" sz="2800" b="1" dirty="0">
-                <a:solidFill>
-                  <a:srgbClr val="333333"/>
+              <a:rPr lang="en-US" sz="4000" b="1" dirty="0">
+                <a:solidFill>
+                  <a:srgbClr val="FFFFFF"/>
                 </a:solidFill>
                 <a:latin typeface="Arial" pitchFamily="34" charset="0"/>
                 <a:ea typeface="Arial" pitchFamily="34" charset="-122"/>
@@ -1704,20 +1731,20 @@
               </a:rPr>
               <a:t>Aerivio Systems</a:t>
             </a:r>
-            <a:endParaRPr lang="en-US" sz="2800" dirty="0"/>
-          </a:p>
-        </p:txBody>
-      </p:sp>
-      <p:sp>
-        <p:nvSpPr>
-          <p:cNvPr id="3" name="Text 1"/>
-          <p:cNvSpPr/>
-          <p:nvPr/>
-        </p:nvSpPr>
-        <p:spPr>
-          <a:xfrm>
-            <a:off x="457200" y="1371600"/>
-            <a:ext cx="11274552" cy="365760"/>
+            <a:endParaRPr lang="en-US" sz="4000" dirty="0"/>
+          </a:p>
+        </p:txBody>
+      </p:sp>
+      <p:sp>
+        <p:nvSpPr>
+          <p:cNvPr id="4" name="Text 2"/>
+          <p:cNvSpPr/>
+          <p:nvPr/>
+        </p:nvSpPr>
+        <p:spPr>
+          <a:xfrm>
+            <a:off x="548640" y="2743200"/>
+            <a:ext cx="11091672" cy="457200"/>
           </a:xfrm>
           <a:prstGeom prst="rect">
             <a:avLst/>
@@ -1733,9 +1760,9 @@
               <a:buNone/>
             </a:pPr>
             <a:r>
-              <a:rPr lang="en-US" sz="1800" dirty="0">
-                <a:solidFill>
-                  <a:srgbClr val="444444"/>
+              <a:rPr lang="en-US" sz="2200" b="1" dirty="0">
+                <a:solidFill>
+                  <a:srgbClr val="1E293B"/>
                 </a:solidFill>
                 <a:latin typeface="Arial" pitchFamily="34" charset="0"/>
                 <a:ea typeface="Arial" pitchFamily="34" charset="-122"/>
@@ -1743,20 +1770,20 @@
               </a:rPr>
               <a:t>Company Overview</a:t>
             </a:r>
-            <a:endParaRPr lang="en-US" sz="1800" dirty="0"/>
-          </a:p>
-        </p:txBody>
-      </p:sp>
-      <p:sp>
-        <p:nvSpPr>
-          <p:cNvPr id="4" name="Text 2"/>
-          <p:cNvSpPr/>
-          <p:nvPr/>
-        </p:nvSpPr>
-        <p:spPr>
-          <a:xfrm>
-            <a:off x="457200" y="1828800"/>
-            <a:ext cx="11274552" cy="365760"/>
+            <a:endParaRPr lang="en-US" sz="2200" dirty="0"/>
+          </a:p>
+        </p:txBody>
+      </p:sp>
+      <p:sp>
+        <p:nvSpPr>
+          <p:cNvPr id="5" name="Text 3"/>
+          <p:cNvSpPr/>
+          <p:nvPr/>
+        </p:nvSpPr>
+        <p:spPr>
+          <a:xfrm>
+            <a:off x="548640" y="3383280"/>
+            <a:ext cx="11091672" cy="457200"/>
           </a:xfrm>
           <a:prstGeom prst="rect">
             <a:avLst/>
@@ -1772,9 +1799,9 @@
               <a:buNone/>
             </a:pPr>
             <a:r>
-              <a:rPr lang="en-US" sz="1800" dirty="0">
-                <a:solidFill>
-                  <a:srgbClr val="444444"/>
+              <a:rPr lang="en-US" sz="1600" dirty="0">
+                <a:solidFill>
+                  <a:srgbClr val="64748B"/>
                 </a:solidFill>
                 <a:latin typeface="Arial" pitchFamily="34" charset="0"/>
                 <a:ea typeface="Arial" pitchFamily="34" charset="-122"/>
@@ -1782,20 +1809,20 @@
               </a:rPr>
               <a:t>Edge AI for distributed maritime autonomy</a:t>
             </a:r>
-            <a:endParaRPr lang="en-US" sz="1800" dirty="0"/>
-          </a:p>
-        </p:txBody>
-      </p:sp>
-      <p:sp>
-        <p:nvSpPr>
-          <p:cNvPr id="5" name="Text 3"/>
-          <p:cNvSpPr/>
-          <p:nvPr/>
-        </p:nvSpPr>
-        <p:spPr>
-          <a:xfrm>
-            <a:off x="457200" y="2286000"/>
-            <a:ext cx="11274552" cy="365760"/>
+            <a:endParaRPr lang="en-US" sz="1600" dirty="0"/>
+          </a:p>
+        </p:txBody>
+      </p:sp>
+      <p:sp>
+        <p:nvSpPr>
+          <p:cNvPr id="6" name="Text 4"/>
+          <p:cNvSpPr/>
+          <p:nvPr/>
+        </p:nvSpPr>
+        <p:spPr>
+          <a:xfrm>
+            <a:off x="548640" y="3794760"/>
+            <a:ext cx="11091672" cy="457200"/>
           </a:xfrm>
           <a:prstGeom prst="rect">
             <a:avLst/>
@@ -1811,9 +1838,9 @@
               <a:buNone/>
             </a:pPr>
             <a:r>
-              <a:rPr lang="en-US" sz="1800" dirty="0">
-                <a:solidFill>
-                  <a:srgbClr val="444444"/>
+              <a:rPr lang="en-US" sz="1600" dirty="0">
+                <a:solidFill>
+                  <a:srgbClr val="64748B"/>
                 </a:solidFill>
                 <a:latin typeface="Arial" pitchFamily="34" charset="0"/>
                 <a:ea typeface="Arial" pitchFamily="34" charset="-122"/>
@@ -1821,9 +1848,29 @@
               </a:rPr>
               <a:t>Volume 5 Supporting Document · Navy STTR Phase I · Topic N25B-T042</a:t>
             </a:r>
-            <a:endParaRPr lang="en-US" sz="1800" dirty="0"/>
-          </a:p>
-        </p:txBody>
+            <a:endParaRPr lang="en-US" sz="1600" dirty="0"/>
+          </a:p>
+        </p:txBody>
+      </p:sp>
+      <p:sp>
+        <p:nvSpPr>
+          <p:cNvPr id="7" name="Shape 5"/>
+          <p:cNvSpPr/>
+          <p:nvPr/>
+        </p:nvSpPr>
+        <p:spPr>
+          <a:xfrm>
+            <a:off x="0" y="6601968"/>
+            <a:ext cx="12188952" cy="256032"/>
+          </a:xfrm>
+          <a:prstGeom prst="rect">
+            <a:avLst/>
+          </a:prstGeom>
+          <a:solidFill>
+            <a:srgbClr val="0F2942"/>
+          </a:solidFill>
+          <a:ln/>
+        </p:spPr>
       </p:sp>
     </p:spTree>
   </p:cSld>
@@ -1836,6 +1883,13 @@
 <file path=ppt/slides/slide10.xml><?xml version="1.0" encoding="utf-8"?>
 <p:sld xmlns:a="http://schemas.openxmlformats.org/drawingml/2006/main" xmlns:r="http://schemas.openxmlformats.org/officeDocument/2006/relationships" xmlns:p="http://schemas.openxmlformats.org/presentationml/2006/main">
   <p:cSld name="Slide 10">
+    <p:bg>
+      <p:bgPr>
+        <a:solidFill>
+          <a:srgbClr val="FFFFFF"/>
+        </a:solidFill>
+      </p:bgPr>
+    </p:bg>
     <p:spTree>
       <p:nvGrpSpPr>
         <p:cNvPr id="1" name=""/>
@@ -1852,14 +1906,34 @@
       </p:grpSpPr>
       <p:sp>
         <p:nvSpPr>
-          <p:cNvPr id="2" name="Text 0"/>
-          <p:cNvSpPr/>
-          <p:nvPr/>
-        </p:nvSpPr>
-        <p:spPr>
-          <a:xfrm>
-            <a:off x="457200" y="274320"/>
-            <a:ext cx="11274552" cy="914400"/>
+          <p:cNvPr id="2" name="Shape 0"/>
+          <p:cNvSpPr/>
+          <p:nvPr/>
+        </p:nvSpPr>
+        <p:spPr>
+          <a:xfrm>
+            <a:off x="0" y="0"/>
+            <a:ext cx="146304" cy="6858000"/>
+          </a:xfrm>
+          <a:prstGeom prst="rect">
+            <a:avLst/>
+          </a:prstGeom>
+          <a:solidFill>
+            <a:srgbClr val="0F2942"/>
+          </a:solidFill>
+          <a:ln/>
+        </p:spPr>
+      </p:sp>
+      <p:sp>
+        <p:nvSpPr>
+          <p:cNvPr id="3" name="Text 1"/>
+          <p:cNvSpPr/>
+          <p:nvPr/>
+        </p:nvSpPr>
+        <p:spPr>
+          <a:xfrm>
+            <a:off x="548640" y="384048"/>
+            <a:ext cx="11091672" cy="822960"/>
           </a:xfrm>
           <a:prstGeom prst="rect">
             <a:avLst/>
@@ -1875,9 +1949,9 @@
               <a:buNone/>
             </a:pPr>
             <a:r>
-              <a:rPr lang="en-US" sz="2800" b="1" dirty="0">
-                <a:solidFill>
-                  <a:srgbClr val="333333"/>
+              <a:rPr lang="en-US" sz="3000" b="1" dirty="0">
+                <a:solidFill>
+                  <a:srgbClr val="0F2942"/>
                 </a:solidFill>
                 <a:latin typeface="Arial" pitchFamily="34" charset="0"/>
                 <a:ea typeface="Arial" pitchFamily="34" charset="-122"/>
@@ -1885,20 +1959,40 @@
               </a:rPr>
               <a:t>Summary</a:t>
             </a:r>
-            <a:endParaRPr lang="en-US" sz="2800" dirty="0"/>
-          </a:p>
-        </p:txBody>
-      </p:sp>
-      <p:sp>
-        <p:nvSpPr>
-          <p:cNvPr id="3" name="Text 1"/>
-          <p:cNvSpPr/>
-          <p:nvPr/>
-        </p:nvSpPr>
-        <p:spPr>
-          <a:xfrm>
-            <a:off x="457200" y="1371600"/>
-            <a:ext cx="11274552" cy="960120"/>
+            <a:endParaRPr lang="en-US" sz="3000" dirty="0"/>
+          </a:p>
+        </p:txBody>
+      </p:sp>
+      <p:sp>
+        <p:nvSpPr>
+          <p:cNvPr id="4" name="Shape 2"/>
+          <p:cNvSpPr/>
+          <p:nvPr/>
+        </p:nvSpPr>
+        <p:spPr>
+          <a:xfrm>
+            <a:off x="566928" y="1243584"/>
+            <a:ext cx="2194560" cy="50292"/>
+          </a:xfrm>
+          <a:prstGeom prst="rect">
+            <a:avLst/>
+          </a:prstGeom>
+          <a:solidFill>
+            <a:srgbClr val="0F2942"/>
+          </a:solidFill>
+          <a:ln/>
+        </p:spPr>
+      </p:sp>
+      <p:sp>
+        <p:nvSpPr>
+          <p:cNvPr id="5" name="Text 3"/>
+          <p:cNvSpPr/>
+          <p:nvPr/>
+        </p:nvSpPr>
+        <p:spPr>
+          <a:xfrm>
+            <a:off x="548640" y="1554480"/>
+            <a:ext cx="11091672" cy="1152144"/>
           </a:xfrm>
           <a:prstGeom prst="rect">
             <a:avLst/>
@@ -1910,14 +2004,20 @@
           <a:bodyPr wrap="square" rtlCol="0" anchor="t"/>
           <a:lstStyle/>
           <a:p>
-            <a:pPr marL="342900" indent="-342900">
+            <a:pPr marL="228600" indent="-228600">
+              <a:lnSpc>
+                <a:spcPct val="105000"/>
+              </a:lnSpc>
+              <a:spcAft>
+                <a:spcPts val="800"/>
+              </a:spcAft>
               <a:buSzPct val="100000"/>
               <a:buChar char="•"/>
             </a:pPr>
             <a:r>
               <a:rPr lang="en-US" sz="1800" dirty="0">
                 <a:solidFill>
-                  <a:srgbClr val="444444"/>
+                  <a:srgbClr val="1E293B"/>
                 </a:solidFill>
                 <a:latin typeface="Arial" pitchFamily="34" charset="0"/>
                 <a:ea typeface="Arial" pitchFamily="34" charset="-122"/>
@@ -1928,14 +2028,20 @@
             <a:endParaRPr lang="en-US" sz="1800" dirty="0"/>
           </a:p>
           <a:p>
-            <a:pPr marL="342900" indent="-342900">
+            <a:pPr marL="228600" indent="-228600">
+              <a:lnSpc>
+                <a:spcPct val="105000"/>
+              </a:lnSpc>
+              <a:spcAft>
+                <a:spcPts val="800"/>
+              </a:spcAft>
               <a:buSzPct val="100000"/>
               <a:buChar char="•"/>
             </a:pPr>
             <a:r>
               <a:rPr lang="en-US" sz="1800" dirty="0">
                 <a:solidFill>
-                  <a:srgbClr val="444444"/>
+                  <a:srgbClr val="1E293B"/>
                 </a:solidFill>
                 <a:latin typeface="Arial" pitchFamily="34" charset="0"/>
                 <a:ea typeface="Arial" pitchFamily="34" charset="-122"/>
@@ -1946,14 +2052,20 @@
             <a:endParaRPr lang="en-US" sz="1800" dirty="0"/>
           </a:p>
           <a:p>
-            <a:pPr marL="342900" indent="-342900">
+            <a:pPr marL="228600" indent="-228600">
+              <a:lnSpc>
+                <a:spcPct val="105000"/>
+              </a:lnSpc>
+              <a:spcAft>
+                <a:spcPts val="800"/>
+              </a:spcAft>
               <a:buSzPct val="100000"/>
               <a:buChar char="•"/>
             </a:pPr>
             <a:r>
               <a:rPr lang="en-US" sz="1800" dirty="0">
                 <a:solidFill>
-                  <a:srgbClr val="444444"/>
+                  <a:srgbClr val="1E293B"/>
                 </a:solidFill>
                 <a:latin typeface="Arial" pitchFamily="34" charset="0"/>
                 <a:ea typeface="Arial" pitchFamily="34" charset="-122"/>
@@ -1967,14 +2079,14 @@
       </p:sp>
       <p:sp>
         <p:nvSpPr>
-          <p:cNvPr id="4" name="Text 2"/>
-          <p:cNvSpPr/>
-          <p:nvPr/>
-        </p:nvSpPr>
-        <p:spPr>
-          <a:xfrm>
-            <a:off x="457200" y="2423160"/>
-            <a:ext cx="11274552" cy="365760"/>
+          <p:cNvPr id="6" name="Text 4"/>
+          <p:cNvSpPr/>
+          <p:nvPr/>
+        </p:nvSpPr>
+        <p:spPr>
+          <a:xfrm>
+            <a:off x="548640" y="2816352"/>
+            <a:ext cx="11091672" cy="320040"/>
           </a:xfrm>
           <a:prstGeom prst="rect">
             <a:avLst/>
@@ -1992,7 +2104,7 @@
             <a:r>
               <a:rPr lang="en-US" sz="1800" dirty="0">
                 <a:solidFill>
-                  <a:srgbClr val="444444"/>
+                  <a:srgbClr val="64748B"/>
                 </a:solidFill>
                 <a:latin typeface="Arial" pitchFamily="34" charset="0"/>
                 <a:ea typeface="Arial" pitchFamily="34" charset="-122"/>
@@ -2001,6 +2113,45 @@
               <a:t>Aerivio Systems · contact@aerivio.example · Proprietary</a:t>
             </a:r>
             <a:endParaRPr lang="en-US" sz="1800" dirty="0"/>
+          </a:p>
+        </p:txBody>
+      </p:sp>
+      <p:sp>
+        <p:nvSpPr>
+          <p:cNvPr id="7" name="Text 5"/>
+          <p:cNvSpPr/>
+          <p:nvPr/>
+        </p:nvSpPr>
+        <p:spPr>
+          <a:xfrm>
+            <a:off x="11274552" y="6446520"/>
+            <a:ext cx="548640" cy="274320"/>
+          </a:xfrm>
+          <a:prstGeom prst="rect">
+            <a:avLst/>
+          </a:prstGeom>
+          <a:noFill/>
+          <a:ln/>
+        </p:spPr>
+        <p:txBody>
+          <a:bodyPr wrap="square" rtlCol="0" anchor="ctr"/>
+          <a:lstStyle/>
+          <a:p>
+            <a:pPr algn="r" indent="0" marL="0">
+              <a:buNone/>
+            </a:pPr>
+            <a:r>
+              <a:rPr lang="en-US" sz="1000" dirty="0">
+                <a:solidFill>
+                  <a:srgbClr val="64748B"/>
+                </a:solidFill>
+                <a:latin typeface="Arial" pitchFamily="34" charset="0"/>
+                <a:ea typeface="Arial" pitchFamily="34" charset="-122"/>
+                <a:cs typeface="Arial" pitchFamily="34" charset="-120"/>
+              </a:rPr>
+              <a:t>10</a:t>
+            </a:r>
+            <a:endParaRPr lang="en-US" sz="1000" dirty="0"/>
           </a:p>
         </p:txBody>
       </p:sp>
@@ -2015,6 +2166,13 @@
 <file path=ppt/slides/slide2.xml><?xml version="1.0" encoding="utf-8"?>
 <p:sld xmlns:a="http://schemas.openxmlformats.org/drawingml/2006/main" xmlns:r="http://schemas.openxmlformats.org/officeDocument/2006/relationships" xmlns:p="http://schemas.openxmlformats.org/presentationml/2006/main">
   <p:cSld name="Slide 2">
+    <p:bg>
+      <p:bgPr>
+        <a:solidFill>
+          <a:srgbClr val="FFFFFF"/>
+        </a:solidFill>
+      </p:bgPr>
+    </p:bg>
     <p:spTree>
       <p:nvGrpSpPr>
         <p:cNvPr id="1" name=""/>
@@ -2031,14 +2189,34 @@
       </p:grpSpPr>
       <p:sp>
         <p:nvSpPr>
-          <p:cNvPr id="2" name="Text 0"/>
-          <p:cNvSpPr/>
-          <p:nvPr/>
-        </p:nvSpPr>
-        <p:spPr>
-          <a:xfrm>
-            <a:off x="457200" y="274320"/>
-            <a:ext cx="11274552" cy="914400"/>
+          <p:cNvPr id="2" name="Shape 0"/>
+          <p:cNvSpPr/>
+          <p:nvPr/>
+        </p:nvSpPr>
+        <p:spPr>
+          <a:xfrm>
+            <a:off x="0" y="0"/>
+            <a:ext cx="146304" cy="6858000"/>
+          </a:xfrm>
+          <a:prstGeom prst="rect">
+            <a:avLst/>
+          </a:prstGeom>
+          <a:solidFill>
+            <a:srgbClr val="0F2942"/>
+          </a:solidFill>
+          <a:ln/>
+        </p:spPr>
+      </p:sp>
+      <p:sp>
+        <p:nvSpPr>
+          <p:cNvPr id="3" name="Text 1"/>
+          <p:cNvSpPr/>
+          <p:nvPr/>
+        </p:nvSpPr>
+        <p:spPr>
+          <a:xfrm>
+            <a:off x="548640" y="384048"/>
+            <a:ext cx="11091672" cy="822960"/>
           </a:xfrm>
           <a:prstGeom prst="rect">
             <a:avLst/>
@@ -2054,9 +2232,9 @@
               <a:buNone/>
             </a:pPr>
             <a:r>
-              <a:rPr lang="en-US" sz="2800" b="1" dirty="0">
-                <a:solidFill>
-                  <a:srgbClr val="333333"/>
+              <a:rPr lang="en-US" sz="3000" b="1" dirty="0">
+                <a:solidFill>
+                  <a:srgbClr val="0F2942"/>
                 </a:solidFill>
                 <a:latin typeface="Arial" pitchFamily="34" charset="0"/>
                 <a:ea typeface="Arial" pitchFamily="34" charset="-122"/>
@@ -2064,20 +2242,40 @@
               </a:rPr>
               <a:t>Who We Are</a:t>
             </a:r>
-            <a:endParaRPr lang="en-US" sz="2800" dirty="0"/>
-          </a:p>
-        </p:txBody>
-      </p:sp>
-      <p:sp>
-        <p:nvSpPr>
-          <p:cNvPr id="3" name="Text 1"/>
-          <p:cNvSpPr/>
-          <p:nvPr/>
-        </p:nvSpPr>
-        <p:spPr>
-          <a:xfrm>
-            <a:off x="457200" y="1371600"/>
-            <a:ext cx="11274552" cy="1280160"/>
+            <a:endParaRPr lang="en-US" sz="3000" dirty="0"/>
+          </a:p>
+        </p:txBody>
+      </p:sp>
+      <p:sp>
+        <p:nvSpPr>
+          <p:cNvPr id="4" name="Shape 2"/>
+          <p:cNvSpPr/>
+          <p:nvPr/>
+        </p:nvSpPr>
+        <p:spPr>
+          <a:xfrm>
+            <a:off x="566928" y="1243584"/>
+            <a:ext cx="2194560" cy="50292"/>
+          </a:xfrm>
+          <a:prstGeom prst="rect">
+            <a:avLst/>
+          </a:prstGeom>
+          <a:solidFill>
+            <a:srgbClr val="0F2942"/>
+          </a:solidFill>
+          <a:ln/>
+        </p:spPr>
+      </p:sp>
+      <p:sp>
+        <p:nvSpPr>
+          <p:cNvPr id="5" name="Text 3"/>
+          <p:cNvSpPr/>
+          <p:nvPr/>
+        </p:nvSpPr>
+        <p:spPr>
+          <a:xfrm>
+            <a:off x="548640" y="1554480"/>
+            <a:ext cx="11091672" cy="1536192"/>
           </a:xfrm>
           <a:prstGeom prst="rect">
             <a:avLst/>
@@ -2089,14 +2287,20 @@
           <a:bodyPr wrap="square" rtlCol="0" anchor="t"/>
           <a:lstStyle/>
           <a:p>
-            <a:pPr marL="342900" indent="-342900">
+            <a:pPr marL="228600" indent="-228600">
+              <a:lnSpc>
+                <a:spcPct val="105000"/>
+              </a:lnSpc>
+              <a:spcAft>
+                <a:spcPts val="800"/>
+              </a:spcAft>
               <a:buSzPct val="100000"/>
               <a:buChar char="•"/>
             </a:pPr>
             <a:r>
               <a:rPr lang="en-US" sz="1800" dirty="0">
                 <a:solidFill>
-                  <a:srgbClr val="444444"/>
+                  <a:srgbClr val="1E293B"/>
                 </a:solidFill>
                 <a:latin typeface="Arial" pitchFamily="34" charset="0"/>
                 <a:ea typeface="Arial" pitchFamily="34" charset="-122"/>
@@ -2107,14 +2311,20 @@
             <a:endParaRPr lang="en-US" sz="1800" dirty="0"/>
           </a:p>
           <a:p>
-            <a:pPr marL="342900" indent="-342900">
+            <a:pPr marL="228600" indent="-228600">
+              <a:lnSpc>
+                <a:spcPct val="105000"/>
+              </a:lnSpc>
+              <a:spcAft>
+                <a:spcPts val="800"/>
+              </a:spcAft>
               <a:buSzPct val="100000"/>
               <a:buChar char="•"/>
             </a:pPr>
             <a:r>
               <a:rPr lang="en-US" sz="1800" dirty="0">
                 <a:solidFill>
-                  <a:srgbClr val="444444"/>
+                  <a:srgbClr val="1E293B"/>
                 </a:solidFill>
                 <a:latin typeface="Arial" pitchFamily="34" charset="0"/>
                 <a:ea typeface="Arial" pitchFamily="34" charset="-122"/>
@@ -2125,14 +2335,20 @@
             <a:endParaRPr lang="en-US" sz="1800" dirty="0"/>
           </a:p>
           <a:p>
-            <a:pPr marL="342900" indent="-342900">
+            <a:pPr marL="228600" indent="-228600">
+              <a:lnSpc>
+                <a:spcPct val="105000"/>
+              </a:lnSpc>
+              <a:spcAft>
+                <a:spcPts val="800"/>
+              </a:spcAft>
               <a:buSzPct val="100000"/>
               <a:buChar char="•"/>
             </a:pPr>
             <a:r>
               <a:rPr lang="en-US" sz="1800" dirty="0">
                 <a:solidFill>
-                  <a:srgbClr val="444444"/>
+                  <a:srgbClr val="1E293B"/>
                 </a:solidFill>
                 <a:latin typeface="Arial" pitchFamily="34" charset="0"/>
                 <a:ea typeface="Arial" pitchFamily="34" charset="-122"/>
@@ -2143,14 +2359,20 @@
             <a:endParaRPr lang="en-US" sz="1800" dirty="0"/>
           </a:p>
           <a:p>
-            <a:pPr marL="342900" indent="-342900">
+            <a:pPr marL="228600" indent="-228600">
+              <a:lnSpc>
+                <a:spcPct val="105000"/>
+              </a:lnSpc>
+              <a:spcAft>
+                <a:spcPts val="800"/>
+              </a:spcAft>
               <a:buSzPct val="100000"/>
               <a:buChar char="•"/>
             </a:pPr>
             <a:r>
               <a:rPr lang="en-US" sz="1800" dirty="0">
                 <a:solidFill>
-                  <a:srgbClr val="444444"/>
+                  <a:srgbClr val="1E293B"/>
                 </a:solidFill>
                 <a:latin typeface="Arial" pitchFamily="34" charset="0"/>
                 <a:ea typeface="Arial" pitchFamily="34" charset="-122"/>
@@ -2159,6 +2381,45 @@
               <a:t>Mission: put reliable classification where connectivity fails — the contested edge</a:t>
             </a:r>
             <a:endParaRPr lang="en-US" sz="1800" dirty="0"/>
+          </a:p>
+        </p:txBody>
+      </p:sp>
+      <p:sp>
+        <p:nvSpPr>
+          <p:cNvPr id="6" name="Text 4"/>
+          <p:cNvSpPr/>
+          <p:nvPr/>
+        </p:nvSpPr>
+        <p:spPr>
+          <a:xfrm>
+            <a:off x="11274552" y="6446520"/>
+            <a:ext cx="548640" cy="274320"/>
+          </a:xfrm>
+          <a:prstGeom prst="rect">
+            <a:avLst/>
+          </a:prstGeom>
+          <a:noFill/>
+          <a:ln/>
+        </p:spPr>
+        <p:txBody>
+          <a:bodyPr wrap="square" rtlCol="0" anchor="ctr"/>
+          <a:lstStyle/>
+          <a:p>
+            <a:pPr algn="r" indent="0" marL="0">
+              <a:buNone/>
+            </a:pPr>
+            <a:r>
+              <a:rPr lang="en-US" sz="1000" dirty="0">
+                <a:solidFill>
+                  <a:srgbClr val="64748B"/>
+                </a:solidFill>
+                <a:latin typeface="Arial" pitchFamily="34" charset="0"/>
+                <a:ea typeface="Arial" pitchFamily="34" charset="-122"/>
+                <a:cs typeface="Arial" pitchFamily="34" charset="-120"/>
+              </a:rPr>
+              <a:t>2</a:t>
+            </a:r>
+            <a:endParaRPr lang="en-US" sz="1000" dirty="0"/>
           </a:p>
         </p:txBody>
       </p:sp>
@@ -2173,6 +2434,13 @@
 <file path=ppt/slides/slide3.xml><?xml version="1.0" encoding="utf-8"?>
 <p:sld xmlns:a="http://schemas.openxmlformats.org/drawingml/2006/main" xmlns:r="http://schemas.openxmlformats.org/officeDocument/2006/relationships" xmlns:p="http://schemas.openxmlformats.org/presentationml/2006/main">
   <p:cSld name="Slide 3">
+    <p:bg>
+      <p:bgPr>
+        <a:solidFill>
+          <a:srgbClr val="FFFFFF"/>
+        </a:solidFill>
+      </p:bgPr>
+    </p:bg>
     <p:spTree>
       <p:nvGrpSpPr>
         <p:cNvPr id="1" name=""/>
@@ -2189,14 +2457,34 @@
       </p:grpSpPr>
       <p:sp>
         <p:nvSpPr>
-          <p:cNvPr id="2" name="Text 0"/>
-          <p:cNvSpPr/>
-          <p:nvPr/>
-        </p:nvSpPr>
-        <p:spPr>
-          <a:xfrm>
-            <a:off x="457200" y="274320"/>
-            <a:ext cx="11274552" cy="914400"/>
+          <p:cNvPr id="2" name="Shape 0"/>
+          <p:cNvSpPr/>
+          <p:nvPr/>
+        </p:nvSpPr>
+        <p:spPr>
+          <a:xfrm>
+            <a:off x="0" y="0"/>
+            <a:ext cx="146304" cy="6858000"/>
+          </a:xfrm>
+          <a:prstGeom prst="rect">
+            <a:avLst/>
+          </a:prstGeom>
+          <a:solidFill>
+            <a:srgbClr val="0F2942"/>
+          </a:solidFill>
+          <a:ln/>
+        </p:spPr>
+      </p:sp>
+      <p:sp>
+        <p:nvSpPr>
+          <p:cNvPr id="3" name="Text 1"/>
+          <p:cNvSpPr/>
+          <p:nvPr/>
+        </p:nvSpPr>
+        <p:spPr>
+          <a:xfrm>
+            <a:off x="548640" y="384048"/>
+            <a:ext cx="11091672" cy="822960"/>
           </a:xfrm>
           <a:prstGeom prst="rect">
             <a:avLst/>
@@ -2212,9 +2500,9 @@
               <a:buNone/>
             </a:pPr>
             <a:r>
-              <a:rPr lang="en-US" sz="2800" b="1" dirty="0">
-                <a:solidFill>
-                  <a:srgbClr val="333333"/>
+              <a:rPr lang="en-US" sz="3000" b="1" dirty="0">
+                <a:solidFill>
+                  <a:srgbClr val="0F2942"/>
                 </a:solidFill>
                 <a:latin typeface="Arial" pitchFamily="34" charset="0"/>
                 <a:ea typeface="Arial" pitchFamily="34" charset="-122"/>
@@ -2222,20 +2510,40 @@
               </a:rPr>
               <a:t>The Team</a:t>
             </a:r>
-            <a:endParaRPr lang="en-US" sz="2800" dirty="0"/>
-          </a:p>
-        </p:txBody>
-      </p:sp>
-      <p:sp>
-        <p:nvSpPr>
-          <p:cNvPr id="3" name="Text 1"/>
-          <p:cNvSpPr/>
-          <p:nvPr/>
-        </p:nvSpPr>
-        <p:spPr>
-          <a:xfrm>
-            <a:off x="457200" y="1371600"/>
-            <a:ext cx="11274552" cy="1280160"/>
+            <a:endParaRPr lang="en-US" sz="3000" dirty="0"/>
+          </a:p>
+        </p:txBody>
+      </p:sp>
+      <p:sp>
+        <p:nvSpPr>
+          <p:cNvPr id="4" name="Shape 2"/>
+          <p:cNvSpPr/>
+          <p:nvPr/>
+        </p:nvSpPr>
+        <p:spPr>
+          <a:xfrm>
+            <a:off x="566928" y="1243584"/>
+            <a:ext cx="2194560" cy="50292"/>
+          </a:xfrm>
+          <a:prstGeom prst="rect">
+            <a:avLst/>
+          </a:prstGeom>
+          <a:solidFill>
+            <a:srgbClr val="0F2942"/>
+          </a:solidFill>
+          <a:ln/>
+        </p:spPr>
+      </p:sp>
+      <p:sp>
+        <p:nvSpPr>
+          <p:cNvPr id="5" name="Text 3"/>
+          <p:cNvSpPr/>
+          <p:nvPr/>
+        </p:nvSpPr>
+        <p:spPr>
+          <a:xfrm>
+            <a:off x="548640" y="1554480"/>
+            <a:ext cx="11091672" cy="1536192"/>
           </a:xfrm>
           <a:prstGeom prst="rect">
             <a:avLst/>
@@ -2247,14 +2555,20 @@
           <a:bodyPr wrap="square" rtlCol="0" anchor="t"/>
           <a:lstStyle/>
           <a:p>
-            <a:pPr marL="342900" indent="-342900">
+            <a:pPr marL="228600" indent="-228600">
+              <a:lnSpc>
+                <a:spcPct val="105000"/>
+              </a:lnSpc>
+              <a:spcAft>
+                <a:spcPts val="800"/>
+              </a:spcAft>
               <a:buSzPct val="100000"/>
               <a:buChar char="•"/>
             </a:pPr>
             <a:r>
               <a:rPr lang="en-US" sz="1800" dirty="0">
                 <a:solidFill>
-                  <a:srgbClr val="444444"/>
+                  <a:srgbClr val="1E293B"/>
                 </a:solidFill>
                 <a:latin typeface="Arial" pitchFamily="34" charset="0"/>
                 <a:ea typeface="Arial" pitchFamily="34" charset="-122"/>
@@ -2265,14 +2579,20 @@
             <a:endParaRPr lang="en-US" sz="1800" dirty="0"/>
           </a:p>
           <a:p>
-            <a:pPr marL="342900" indent="-342900">
+            <a:pPr marL="228600" indent="-228600">
+              <a:lnSpc>
+                <a:spcPct val="105000"/>
+              </a:lnSpc>
+              <a:spcAft>
+                <a:spcPts val="800"/>
+              </a:spcAft>
               <a:buSzPct val="100000"/>
               <a:buChar char="•"/>
             </a:pPr>
             <a:r>
               <a:rPr lang="en-US" sz="1800" dirty="0">
                 <a:solidFill>
-                  <a:srgbClr val="444444"/>
+                  <a:srgbClr val="1E293B"/>
                 </a:solidFill>
                 <a:latin typeface="Arial" pitchFamily="34" charset="0"/>
                 <a:ea typeface="Arial" pitchFamily="34" charset="-122"/>
@@ -2283,14 +2603,20 @@
             <a:endParaRPr lang="en-US" sz="1800" dirty="0"/>
           </a:p>
           <a:p>
-            <a:pPr marL="342900" indent="-342900">
+            <a:pPr marL="228600" indent="-228600">
+              <a:lnSpc>
+                <a:spcPct val="105000"/>
+              </a:lnSpc>
+              <a:spcAft>
+                <a:spcPts val="800"/>
+              </a:spcAft>
               <a:buSzPct val="100000"/>
               <a:buChar char="•"/>
             </a:pPr>
             <a:r>
               <a:rPr lang="en-US" sz="1800" dirty="0">
                 <a:solidFill>
-                  <a:srgbClr val="444444"/>
+                  <a:srgbClr val="1E293B"/>
                 </a:solidFill>
                 <a:latin typeface="Arial" pitchFamily="34" charset="0"/>
                 <a:ea typeface="Arial" pitchFamily="34" charset="-122"/>
@@ -2301,14 +2627,20 @@
             <a:endParaRPr lang="en-US" sz="1800" dirty="0"/>
           </a:p>
           <a:p>
-            <a:pPr marL="342900" indent="-342900">
+            <a:pPr marL="228600" indent="-228600">
+              <a:lnSpc>
+                <a:spcPct val="105000"/>
+              </a:lnSpc>
+              <a:spcAft>
+                <a:spcPts val="800"/>
+              </a:spcAft>
               <a:buSzPct val="100000"/>
               <a:buChar char="•"/>
             </a:pPr>
             <a:r>
               <a:rPr lang="en-US" sz="1800" dirty="0">
                 <a:solidFill>
-                  <a:srgbClr val="444444"/>
+                  <a:srgbClr val="1E293B"/>
                 </a:solidFill>
                 <a:latin typeface="Arial" pitchFamily="34" charset="0"/>
                 <a:ea typeface="Arial" pitchFamily="34" charset="-122"/>
@@ -2322,14 +2654,14 @@
       </p:sp>
       <p:sp>
         <p:nvSpPr>
-          <p:cNvPr id="4" name="Text 2"/>
-          <p:cNvSpPr/>
-          <p:nvPr/>
-        </p:nvSpPr>
-        <p:spPr>
-          <a:xfrm>
-            <a:off x="457200" y="2743200"/>
-            <a:ext cx="11274552" cy="365760"/>
+          <p:cNvPr id="6" name="Text 4"/>
+          <p:cNvSpPr/>
+          <p:nvPr/>
+        </p:nvSpPr>
+        <p:spPr>
+          <a:xfrm>
+            <a:off x="548640" y="3200400"/>
+            <a:ext cx="11091672" cy="320040"/>
           </a:xfrm>
           <a:prstGeom prst="rect">
             <a:avLst/>
@@ -2347,7 +2679,7 @@
             <a:r>
               <a:rPr lang="en-US" sz="1800" dirty="0">
                 <a:solidFill>
-                  <a:srgbClr val="444444"/>
+                  <a:srgbClr val="1E293B"/>
                 </a:solidFill>
                 <a:latin typeface="Arial" pitchFamily="34" charset="0"/>
                 <a:ea typeface="Arial" pitchFamily="34" charset="-122"/>
@@ -2361,7 +2693,7 @@
             <a:r>
               <a:rPr lang="en-US" sz="1800" b="1" dirty="0">
                 <a:solidFill>
-                  <a:srgbClr val="444444"/>
+                  <a:srgbClr val="1E293B"/>
                 </a:solidFill>
                 <a:latin typeface="Arial" pitchFamily="34" charset="0"/>
                 <a:ea typeface="Arial" pitchFamily="34" charset="-122"/>
@@ -2375,7 +2707,7 @@
             <a:r>
               <a:rPr lang="en-US" sz="1800" dirty="0">
                 <a:solidFill>
-                  <a:srgbClr val="444444"/>
+                  <a:srgbClr val="1E293B"/>
                 </a:solidFill>
                 <a:latin typeface="Arial" pitchFamily="34" charset="0"/>
                 <a:ea typeface="Arial" pitchFamily="34" charset="-122"/>
@@ -2384,6 +2716,45 @@
               <a:t> for undersea acoustics research (STTR RI).</a:t>
             </a:r>
             <a:endParaRPr lang="en-US" sz="1800" dirty="0"/>
+          </a:p>
+        </p:txBody>
+      </p:sp>
+      <p:sp>
+        <p:nvSpPr>
+          <p:cNvPr id="7" name="Text 5"/>
+          <p:cNvSpPr/>
+          <p:nvPr/>
+        </p:nvSpPr>
+        <p:spPr>
+          <a:xfrm>
+            <a:off x="11274552" y="6446520"/>
+            <a:ext cx="548640" cy="274320"/>
+          </a:xfrm>
+          <a:prstGeom prst="rect">
+            <a:avLst/>
+          </a:prstGeom>
+          <a:noFill/>
+          <a:ln/>
+        </p:spPr>
+        <p:txBody>
+          <a:bodyPr wrap="square" rtlCol="0" anchor="ctr"/>
+          <a:lstStyle/>
+          <a:p>
+            <a:pPr algn="r" indent="0" marL="0">
+              <a:buNone/>
+            </a:pPr>
+            <a:r>
+              <a:rPr lang="en-US" sz="1000" dirty="0">
+                <a:solidFill>
+                  <a:srgbClr val="64748B"/>
+                </a:solidFill>
+                <a:latin typeface="Arial" pitchFamily="34" charset="0"/>
+                <a:ea typeface="Arial" pitchFamily="34" charset="-122"/>
+                <a:cs typeface="Arial" pitchFamily="34" charset="-120"/>
+              </a:rPr>
+              <a:t>3</a:t>
+            </a:r>
+            <a:endParaRPr lang="en-US" sz="1000" dirty="0"/>
           </a:p>
         </p:txBody>
       </p:sp>
@@ -2398,6 +2769,13 @@
 <file path=ppt/slides/slide4.xml><?xml version="1.0" encoding="utf-8"?>
 <p:sld xmlns:a="http://schemas.openxmlformats.org/drawingml/2006/main" xmlns:r="http://schemas.openxmlformats.org/officeDocument/2006/relationships" xmlns:p="http://schemas.openxmlformats.org/presentationml/2006/main">
   <p:cSld name="Slide 4">
+    <p:bg>
+      <p:bgPr>
+        <a:solidFill>
+          <a:srgbClr val="FFFFFF"/>
+        </a:solidFill>
+      </p:bgPr>
+    </p:bg>
     <p:spTree>
       <p:nvGrpSpPr>
         <p:cNvPr id="1" name=""/>
@@ -2414,14 +2792,34 @@
       </p:grpSpPr>
       <p:sp>
         <p:nvSpPr>
-          <p:cNvPr id="2" name="Text 0"/>
-          <p:cNvSpPr/>
-          <p:nvPr/>
-        </p:nvSpPr>
-        <p:spPr>
-          <a:xfrm>
-            <a:off x="457200" y="274320"/>
-            <a:ext cx="11274552" cy="914400"/>
+          <p:cNvPr id="2" name="Shape 0"/>
+          <p:cNvSpPr/>
+          <p:nvPr/>
+        </p:nvSpPr>
+        <p:spPr>
+          <a:xfrm>
+            <a:off x="0" y="0"/>
+            <a:ext cx="146304" cy="6858000"/>
+          </a:xfrm>
+          <a:prstGeom prst="rect">
+            <a:avLst/>
+          </a:prstGeom>
+          <a:solidFill>
+            <a:srgbClr val="0F2942"/>
+          </a:solidFill>
+          <a:ln/>
+        </p:spPr>
+      </p:sp>
+      <p:sp>
+        <p:nvSpPr>
+          <p:cNvPr id="3" name="Text 1"/>
+          <p:cNvSpPr/>
+          <p:nvPr/>
+        </p:nvSpPr>
+        <p:spPr>
+          <a:xfrm>
+            <a:off x="548640" y="384048"/>
+            <a:ext cx="11091672" cy="822960"/>
           </a:xfrm>
           <a:prstGeom prst="rect">
             <a:avLst/>
@@ -2437,9 +2835,9 @@
               <a:buNone/>
             </a:pPr>
             <a:r>
-              <a:rPr lang="en-US" sz="2800" b="1" dirty="0">
-                <a:solidFill>
-                  <a:srgbClr val="333333"/>
+              <a:rPr lang="en-US" sz="3000" b="1" dirty="0">
+                <a:solidFill>
+                  <a:srgbClr val="0F2942"/>
                 </a:solidFill>
                 <a:latin typeface="Arial" pitchFamily="34" charset="0"/>
                 <a:ea typeface="Arial" pitchFamily="34" charset="-122"/>
@@ -2447,20 +2845,40 @@
               </a:rPr>
               <a:t>Core Technology &amp; IP</a:t>
             </a:r>
-            <a:endParaRPr lang="en-US" sz="2800" dirty="0"/>
-          </a:p>
-        </p:txBody>
-      </p:sp>
-      <p:sp>
-        <p:nvSpPr>
-          <p:cNvPr id="3" name="Text 1"/>
-          <p:cNvSpPr/>
-          <p:nvPr/>
-        </p:nvSpPr>
-        <p:spPr>
-          <a:xfrm>
-            <a:off x="457200" y="1371600"/>
-            <a:ext cx="11274552" cy="1280160"/>
+            <a:endParaRPr lang="en-US" sz="3000" dirty="0"/>
+          </a:p>
+        </p:txBody>
+      </p:sp>
+      <p:sp>
+        <p:nvSpPr>
+          <p:cNvPr id="4" name="Shape 2"/>
+          <p:cNvSpPr/>
+          <p:nvPr/>
+        </p:nvSpPr>
+        <p:spPr>
+          <a:xfrm>
+            <a:off x="566928" y="1243584"/>
+            <a:ext cx="2194560" cy="50292"/>
+          </a:xfrm>
+          <a:prstGeom prst="rect">
+            <a:avLst/>
+          </a:prstGeom>
+          <a:solidFill>
+            <a:srgbClr val="0F2942"/>
+          </a:solidFill>
+          <a:ln/>
+        </p:spPr>
+      </p:sp>
+      <p:sp>
+        <p:nvSpPr>
+          <p:cNvPr id="5" name="Text 3"/>
+          <p:cNvSpPr/>
+          <p:nvPr/>
+        </p:nvSpPr>
+        <p:spPr>
+          <a:xfrm>
+            <a:off x="548640" y="1554480"/>
+            <a:ext cx="11091672" cy="1536192"/>
           </a:xfrm>
           <a:prstGeom prst="rect">
             <a:avLst/>
@@ -2472,14 +2890,20 @@
           <a:bodyPr wrap="square" rtlCol="0" anchor="t"/>
           <a:lstStyle/>
           <a:p>
-            <a:pPr marL="342900" indent="-342900">
+            <a:pPr marL="228600" indent="-228600">
+              <a:lnSpc>
+                <a:spcPct val="105000"/>
+              </a:lnSpc>
+              <a:spcAft>
+                <a:spcPts val="800"/>
+              </a:spcAft>
               <a:buSzPct val="100000"/>
               <a:buChar char="•"/>
             </a:pPr>
             <a:r>
               <a:rPr lang="en-US" sz="1800" dirty="0">
                 <a:solidFill>
-                  <a:srgbClr val="444444"/>
+                  <a:srgbClr val="1E293B"/>
                 </a:solidFill>
                 <a:latin typeface="Arial" pitchFamily="34" charset="0"/>
                 <a:ea typeface="Arial" pitchFamily="34" charset="-122"/>
@@ -2490,14 +2914,20 @@
             <a:endParaRPr lang="en-US" sz="1800" dirty="0"/>
           </a:p>
           <a:p>
-            <a:pPr marL="342900" indent="-342900">
+            <a:pPr marL="228600" indent="-228600">
+              <a:lnSpc>
+                <a:spcPct val="105000"/>
+              </a:lnSpc>
+              <a:spcAft>
+                <a:spcPts val="800"/>
+              </a:spcAft>
               <a:buSzPct val="100000"/>
               <a:buChar char="•"/>
             </a:pPr>
             <a:r>
               <a:rPr lang="en-US" sz="1800" dirty="0">
                 <a:solidFill>
-                  <a:srgbClr val="444444"/>
+                  <a:srgbClr val="1E293B"/>
                 </a:solidFill>
                 <a:latin typeface="Arial" pitchFamily="34" charset="0"/>
                 <a:ea typeface="Arial" pitchFamily="34" charset="-122"/>
@@ -2508,14 +2938,20 @@
             <a:endParaRPr lang="en-US" sz="1800" dirty="0"/>
           </a:p>
           <a:p>
-            <a:pPr marL="342900" indent="-342900">
+            <a:pPr marL="228600" indent="-228600">
+              <a:lnSpc>
+                <a:spcPct val="105000"/>
+              </a:lnSpc>
+              <a:spcAft>
+                <a:spcPts val="800"/>
+              </a:spcAft>
               <a:buSzPct val="100000"/>
               <a:buChar char="•"/>
             </a:pPr>
             <a:r>
               <a:rPr lang="en-US" sz="1800" dirty="0">
                 <a:solidFill>
-                  <a:srgbClr val="444444"/>
+                  <a:srgbClr val="1E293B"/>
                 </a:solidFill>
                 <a:latin typeface="Arial" pitchFamily="34" charset="0"/>
                 <a:ea typeface="Arial" pitchFamily="34" charset="-122"/>
@@ -2526,14 +2962,20 @@
             <a:endParaRPr lang="en-US" sz="1800" dirty="0"/>
           </a:p>
           <a:p>
-            <a:pPr marL="342900" indent="-342900">
+            <a:pPr marL="228600" indent="-228600">
+              <a:lnSpc>
+                <a:spcPct val="105000"/>
+              </a:lnSpc>
+              <a:spcAft>
+                <a:spcPts val="800"/>
+              </a:spcAft>
               <a:buSzPct val="100000"/>
               <a:buChar char="•"/>
             </a:pPr>
             <a:r>
               <a:rPr lang="en-US" sz="1800" dirty="0">
                 <a:solidFill>
-                  <a:srgbClr val="444444"/>
+                  <a:srgbClr val="1E293B"/>
                 </a:solidFill>
                 <a:latin typeface="Arial" pitchFamily="34" charset="0"/>
                 <a:ea typeface="Arial" pitchFamily="34" charset="-122"/>
@@ -2542,6 +2984,108 @@
               <a:t>Result: an accurate maritime classifier in a 2-watt envelope</a:t>
             </a:r>
             <a:endParaRPr lang="en-US" sz="1800" dirty="0"/>
+          </a:p>
+        </p:txBody>
+      </p:sp>
+      <p:pic>
+        <p:nvPicPr>
+          <p:cNvPr id="6" name="Image 0" descr="preencoded.png">    </p:cNvPr>
+          <p:cNvPicPr>
+            <a:picLocks noChangeAspect="1"/>
+          </p:cNvPicPr>
+          <p:nvPr/>
+        </p:nvPicPr>
+        <p:blipFill>
+          <a:blip r:embed="rId1"/>
+          <a:stretch>
+            <a:fillRect/>
+          </a:stretch>
+        </p:blipFill>
+        <p:spPr>
+          <a:xfrm>
+            <a:off x="3083191" y="3200400"/>
+            <a:ext cx="6022571" cy="2880360"/>
+          </a:xfrm>
+          <a:prstGeom prst="rect">
+            <a:avLst/>
+          </a:prstGeom>
+        </p:spPr>
+      </p:pic>
+      <p:sp>
+        <p:nvSpPr>
+          <p:cNvPr id="7" name="Text 4"/>
+          <p:cNvSpPr/>
+          <p:nvPr/>
+        </p:nvSpPr>
+        <p:spPr>
+          <a:xfrm>
+            <a:off x="548640" y="6126480"/>
+            <a:ext cx="11091672" cy="274320"/>
+          </a:xfrm>
+          <a:prstGeom prst="rect">
+            <a:avLst/>
+          </a:prstGeom>
+          <a:noFill/>
+          <a:ln/>
+        </p:spPr>
+        <p:txBody>
+          <a:bodyPr wrap="square" rtlCol="0" anchor="ctr"/>
+          <a:lstStyle/>
+          <a:p>
+            <a:pPr algn="ctr" indent="0" marL="0">
+              <a:buNone/>
+            </a:pPr>
+            <a:r>
+              <a:rPr lang="en-US" sz="1300" i="1" dirty="0">
+                <a:solidFill>
+                  <a:srgbClr val="64748B"/>
+                </a:solidFill>
+                <a:latin typeface="Arial" pitchFamily="34" charset="0"/>
+                <a:ea typeface="Arial" pitchFamily="34" charset="-122"/>
+                <a:cs typeface="Arial" pitchFamily="34" charset="-120"/>
+              </a:rPr>
+              <a:t>On-node inference + consensus fusion — classification at the distributed edge.</a:t>
+            </a:r>
+            <a:endParaRPr lang="en-US" sz="1300" dirty="0"/>
+          </a:p>
+        </p:txBody>
+      </p:sp>
+      <p:sp>
+        <p:nvSpPr>
+          <p:cNvPr id="8" name="Text 5"/>
+          <p:cNvSpPr/>
+          <p:nvPr/>
+        </p:nvSpPr>
+        <p:spPr>
+          <a:xfrm>
+            <a:off x="11274552" y="6446520"/>
+            <a:ext cx="548640" cy="274320"/>
+          </a:xfrm>
+          <a:prstGeom prst="rect">
+            <a:avLst/>
+          </a:prstGeom>
+          <a:noFill/>
+          <a:ln/>
+        </p:spPr>
+        <p:txBody>
+          <a:bodyPr wrap="square" rtlCol="0" anchor="ctr"/>
+          <a:lstStyle/>
+          <a:p>
+            <a:pPr algn="r" indent="0" marL="0">
+              <a:buNone/>
+            </a:pPr>
+            <a:r>
+              <a:rPr lang="en-US" sz="1000" dirty="0">
+                <a:solidFill>
+                  <a:srgbClr val="64748B"/>
+                </a:solidFill>
+                <a:latin typeface="Arial" pitchFamily="34" charset="0"/>
+                <a:ea typeface="Arial" pitchFamily="34" charset="-122"/>
+                <a:cs typeface="Arial" pitchFamily="34" charset="-120"/>
+              </a:rPr>
+              <a:t>4</a:t>
+            </a:r>
+            <a:endParaRPr lang="en-US" sz="1000" dirty="0"/>
           </a:p>
         </p:txBody>
       </p:sp>
@@ -2556,6 +3100,13 @@
 <file path=ppt/slides/slide5.xml><?xml version="1.0" encoding="utf-8"?>
 <p:sld xmlns:a="http://schemas.openxmlformats.org/drawingml/2006/main" xmlns:r="http://schemas.openxmlformats.org/officeDocument/2006/relationships" xmlns:p="http://schemas.openxmlformats.org/presentationml/2006/main">
   <p:cSld name="Slide 5">
+    <p:bg>
+      <p:bgPr>
+        <a:solidFill>
+          <a:srgbClr val="FFFFFF"/>
+        </a:solidFill>
+      </p:bgPr>
+    </p:bg>
     <p:spTree>
       <p:nvGrpSpPr>
         <p:cNvPr id="1" name=""/>
@@ -2572,14 +3123,34 @@
       </p:grpSpPr>
       <p:sp>
         <p:nvSpPr>
-          <p:cNvPr id="2" name="Text 0"/>
-          <p:cNvSpPr/>
-          <p:nvPr/>
-        </p:nvSpPr>
-        <p:spPr>
-          <a:xfrm>
-            <a:off x="457200" y="274320"/>
-            <a:ext cx="11274552" cy="914400"/>
+          <p:cNvPr id="2" name="Shape 0"/>
+          <p:cNvSpPr/>
+          <p:nvPr/>
+        </p:nvSpPr>
+        <p:spPr>
+          <a:xfrm>
+            <a:off x="0" y="0"/>
+            <a:ext cx="146304" cy="6858000"/>
+          </a:xfrm>
+          <a:prstGeom prst="rect">
+            <a:avLst/>
+          </a:prstGeom>
+          <a:solidFill>
+            <a:srgbClr val="0F2942"/>
+          </a:solidFill>
+          <a:ln/>
+        </p:spPr>
+      </p:sp>
+      <p:sp>
+        <p:nvSpPr>
+          <p:cNvPr id="3" name="Text 1"/>
+          <p:cNvSpPr/>
+          <p:nvPr/>
+        </p:nvSpPr>
+        <p:spPr>
+          <a:xfrm>
+            <a:off x="548640" y="384048"/>
+            <a:ext cx="11091672" cy="822960"/>
           </a:xfrm>
           <a:prstGeom prst="rect">
             <a:avLst/>
@@ -2595,9 +3166,9 @@
               <a:buNone/>
             </a:pPr>
             <a:r>
-              <a:rPr lang="en-US" sz="2800" b="1" dirty="0">
-                <a:solidFill>
-                  <a:srgbClr val="333333"/>
+              <a:rPr lang="en-US" sz="3000" b="1" dirty="0">
+                <a:solidFill>
+                  <a:srgbClr val="0F2942"/>
                 </a:solidFill>
                 <a:latin typeface="Arial" pitchFamily="34" charset="0"/>
                 <a:ea typeface="Arial" pitchFamily="34" charset="-122"/>
@@ -2605,20 +3176,40 @@
               </a:rPr>
               <a:t>Past Performance</a:t>
             </a:r>
-            <a:endParaRPr lang="en-US" sz="2800" dirty="0"/>
-          </a:p>
-        </p:txBody>
-      </p:sp>
-      <p:sp>
-        <p:nvSpPr>
-          <p:cNvPr id="3" name="Text 1"/>
-          <p:cNvSpPr/>
-          <p:nvPr/>
-        </p:nvSpPr>
-        <p:spPr>
-          <a:xfrm>
-            <a:off x="457200" y="1371600"/>
-            <a:ext cx="11274552" cy="1280160"/>
+            <a:endParaRPr lang="en-US" sz="3000" dirty="0"/>
+          </a:p>
+        </p:txBody>
+      </p:sp>
+      <p:sp>
+        <p:nvSpPr>
+          <p:cNvPr id="4" name="Shape 2"/>
+          <p:cNvSpPr/>
+          <p:nvPr/>
+        </p:nvSpPr>
+        <p:spPr>
+          <a:xfrm>
+            <a:off x="566928" y="1243584"/>
+            <a:ext cx="2194560" cy="50292"/>
+          </a:xfrm>
+          <a:prstGeom prst="rect">
+            <a:avLst/>
+          </a:prstGeom>
+          <a:solidFill>
+            <a:srgbClr val="0F2942"/>
+          </a:solidFill>
+          <a:ln/>
+        </p:spPr>
+      </p:sp>
+      <p:sp>
+        <p:nvSpPr>
+          <p:cNvPr id="5" name="Text 3"/>
+          <p:cNvSpPr/>
+          <p:nvPr/>
+        </p:nvSpPr>
+        <p:spPr>
+          <a:xfrm>
+            <a:off x="548640" y="1554480"/>
+            <a:ext cx="11091672" cy="1536192"/>
           </a:xfrm>
           <a:prstGeom prst="rect">
             <a:avLst/>
@@ -2630,14 +3221,20 @@
           <a:bodyPr wrap="square" rtlCol="0" anchor="t"/>
           <a:lstStyle/>
           <a:p>
-            <a:pPr marL="342900" indent="-342900">
+            <a:pPr marL="228600" indent="-228600">
+              <a:lnSpc>
+                <a:spcPct val="105000"/>
+              </a:lnSpc>
+              <a:spcAft>
+                <a:spcPts val="800"/>
+              </a:spcAft>
               <a:buSzPct val="100000"/>
               <a:buChar char="•"/>
             </a:pPr>
             <a:r>
               <a:rPr lang="en-US" sz="1800" dirty="0">
                 <a:solidFill>
-                  <a:srgbClr val="444444"/>
+                  <a:srgbClr val="1E293B"/>
                 </a:solidFill>
                 <a:latin typeface="Arial" pitchFamily="34" charset="0"/>
                 <a:ea typeface="Arial" pitchFamily="34" charset="-122"/>
@@ -2648,14 +3245,20 @@
             <a:endParaRPr lang="en-US" sz="1800" dirty="0"/>
           </a:p>
           <a:p>
-            <a:pPr marL="342900" indent="-342900">
+            <a:pPr marL="228600" indent="-228600">
+              <a:lnSpc>
+                <a:spcPct val="105000"/>
+              </a:lnSpc>
+              <a:spcAft>
+                <a:spcPts val="800"/>
+              </a:spcAft>
               <a:buSzPct val="100000"/>
               <a:buChar char="•"/>
             </a:pPr>
             <a:r>
               <a:rPr lang="en-US" sz="1800" dirty="0">
                 <a:solidFill>
-                  <a:srgbClr val="444444"/>
+                  <a:srgbClr val="1E293B"/>
                 </a:solidFill>
                 <a:latin typeface="Arial" pitchFamily="34" charset="0"/>
                 <a:ea typeface="Arial" pitchFamily="34" charset="-122"/>
@@ -2666,14 +3269,20 @@
             <a:endParaRPr lang="en-US" sz="1800" dirty="0"/>
           </a:p>
           <a:p>
-            <a:pPr marL="342900" indent="-342900">
+            <a:pPr marL="228600" indent="-228600">
+              <a:lnSpc>
+                <a:spcPct val="105000"/>
+              </a:lnSpc>
+              <a:spcAft>
+                <a:spcPts val="800"/>
+              </a:spcAft>
               <a:buSzPct val="100000"/>
               <a:buChar char="•"/>
             </a:pPr>
             <a:r>
               <a:rPr lang="en-US" sz="1800" dirty="0">
                 <a:solidFill>
-                  <a:srgbClr val="444444"/>
+                  <a:srgbClr val="1E293B"/>
                 </a:solidFill>
                 <a:latin typeface="Arial" pitchFamily="34" charset="0"/>
                 <a:ea typeface="Arial" pitchFamily="34" charset="-122"/>
@@ -2684,14 +3293,20 @@
             <a:endParaRPr lang="en-US" sz="1800" dirty="0"/>
           </a:p>
           <a:p>
-            <a:pPr marL="342900" indent="-342900">
+            <a:pPr marL="228600" indent="-228600">
+              <a:lnSpc>
+                <a:spcPct val="105000"/>
+              </a:lnSpc>
+              <a:spcAft>
+                <a:spcPts val="800"/>
+              </a:spcAft>
               <a:buSzPct val="100000"/>
               <a:buChar char="•"/>
             </a:pPr>
             <a:r>
               <a:rPr lang="en-US" sz="1800" dirty="0">
                 <a:solidFill>
-                  <a:srgbClr val="444444"/>
+                  <a:srgbClr val="1E293B"/>
                 </a:solidFill>
                 <a:latin typeface="Arial" pitchFamily="34" charset="0"/>
                 <a:ea typeface="Arial" pitchFamily="34" charset="-122"/>
@@ -2705,14 +3320,14 @@
       </p:sp>
       <p:sp>
         <p:nvSpPr>
-          <p:cNvPr id="4" name="Text 2"/>
-          <p:cNvSpPr/>
-          <p:nvPr/>
-        </p:nvSpPr>
-        <p:spPr>
-          <a:xfrm>
-            <a:off x="457200" y="2743200"/>
-            <a:ext cx="11274552" cy="548640"/>
+          <p:cNvPr id="6" name="Text 4"/>
+          <p:cNvSpPr/>
+          <p:nvPr/>
+        </p:nvSpPr>
+        <p:spPr>
+          <a:xfrm>
+            <a:off x="548640" y="3200400"/>
+            <a:ext cx="11091672" cy="512064"/>
           </a:xfrm>
           <a:prstGeom prst="rect">
             <a:avLst/>
@@ -2730,7 +3345,7 @@
             <a:r>
               <a:rPr lang="en-US" sz="1800" dirty="0">
                 <a:solidFill>
-                  <a:srgbClr val="444444"/>
+                  <a:srgbClr val="0E7490"/>
                 </a:solidFill>
                 <a:latin typeface="Arial" pitchFamily="34" charset="0"/>
                 <a:ea typeface="Arial" pitchFamily="34" charset="-122"/>
@@ -2739,6 +3354,45 @@
               <a:t>This STTR builds directly on the AFWERX result — distribution and propagation are the new science.</a:t>
             </a:r>
             <a:endParaRPr lang="en-US" sz="1800" dirty="0"/>
+          </a:p>
+        </p:txBody>
+      </p:sp>
+      <p:sp>
+        <p:nvSpPr>
+          <p:cNvPr id="7" name="Text 5"/>
+          <p:cNvSpPr/>
+          <p:nvPr/>
+        </p:nvSpPr>
+        <p:spPr>
+          <a:xfrm>
+            <a:off x="11274552" y="6446520"/>
+            <a:ext cx="548640" cy="274320"/>
+          </a:xfrm>
+          <a:prstGeom prst="rect">
+            <a:avLst/>
+          </a:prstGeom>
+          <a:noFill/>
+          <a:ln/>
+        </p:spPr>
+        <p:txBody>
+          <a:bodyPr wrap="square" rtlCol="0" anchor="ctr"/>
+          <a:lstStyle/>
+          <a:p>
+            <a:pPr algn="r" indent="0" marL="0">
+              <a:buNone/>
+            </a:pPr>
+            <a:r>
+              <a:rPr lang="en-US" sz="1000" dirty="0">
+                <a:solidFill>
+                  <a:srgbClr val="64748B"/>
+                </a:solidFill>
+                <a:latin typeface="Arial" pitchFamily="34" charset="0"/>
+                <a:ea typeface="Arial" pitchFamily="34" charset="-122"/>
+                <a:cs typeface="Arial" pitchFamily="34" charset="-120"/>
+              </a:rPr>
+              <a:t>5</a:t>
+            </a:r>
+            <a:endParaRPr lang="en-US" sz="1000" dirty="0"/>
           </a:p>
         </p:txBody>
       </p:sp>
@@ -2753,6 +3407,13 @@
 <file path=ppt/slides/slide6.xml><?xml version="1.0" encoding="utf-8"?>
 <p:sld xmlns:a="http://schemas.openxmlformats.org/drawingml/2006/main" xmlns:r="http://schemas.openxmlformats.org/officeDocument/2006/relationships" xmlns:p="http://schemas.openxmlformats.org/presentationml/2006/main">
   <p:cSld name="Slide 6">
+    <p:bg>
+      <p:bgPr>
+        <a:solidFill>
+          <a:srgbClr val="FFFFFF"/>
+        </a:solidFill>
+      </p:bgPr>
+    </p:bg>
     <p:spTree>
       <p:nvGrpSpPr>
         <p:cNvPr id="1" name=""/>
@@ -2769,14 +3430,34 @@
       </p:grpSpPr>
       <p:sp>
         <p:nvSpPr>
-          <p:cNvPr id="2" name="Text 0"/>
-          <p:cNvSpPr/>
-          <p:nvPr/>
-        </p:nvSpPr>
-        <p:spPr>
-          <a:xfrm>
-            <a:off x="457200" y="274320"/>
-            <a:ext cx="11274552" cy="914400"/>
+          <p:cNvPr id="2" name="Shape 0"/>
+          <p:cNvSpPr/>
+          <p:nvPr/>
+        </p:nvSpPr>
+        <p:spPr>
+          <a:xfrm>
+            <a:off x="0" y="0"/>
+            <a:ext cx="146304" cy="6858000"/>
+          </a:xfrm>
+          <a:prstGeom prst="rect">
+            <a:avLst/>
+          </a:prstGeom>
+          <a:solidFill>
+            <a:srgbClr val="0F2942"/>
+          </a:solidFill>
+          <a:ln/>
+        </p:spPr>
+      </p:sp>
+      <p:sp>
+        <p:nvSpPr>
+          <p:cNvPr id="3" name="Text 1"/>
+          <p:cNvSpPr/>
+          <p:nvPr/>
+        </p:nvSpPr>
+        <p:spPr>
+          <a:xfrm>
+            <a:off x="548640" y="384048"/>
+            <a:ext cx="11091672" cy="822960"/>
           </a:xfrm>
           <a:prstGeom prst="rect">
             <a:avLst/>
@@ -2792,9 +3473,9 @@
               <a:buNone/>
             </a:pPr>
             <a:r>
-              <a:rPr lang="en-US" sz="2800" b="1" dirty="0">
-                <a:solidFill>
-                  <a:srgbClr val="333333"/>
+              <a:rPr lang="en-US" sz="3000" b="1" dirty="0">
+                <a:solidFill>
+                  <a:srgbClr val="0F2942"/>
                 </a:solidFill>
                 <a:latin typeface="Arial" pitchFamily="34" charset="0"/>
                 <a:ea typeface="Arial" pitchFamily="34" charset="-122"/>
@@ -2802,20 +3483,40 @@
               </a:rPr>
               <a:t>The STTR Partnership</a:t>
             </a:r>
-            <a:endParaRPr lang="en-US" sz="2800" dirty="0"/>
-          </a:p>
-        </p:txBody>
-      </p:sp>
-      <p:sp>
-        <p:nvSpPr>
-          <p:cNvPr id="3" name="Text 1"/>
-          <p:cNvSpPr/>
-          <p:nvPr/>
-        </p:nvSpPr>
-        <p:spPr>
-          <a:xfrm>
-            <a:off x="457200" y="1371600"/>
-            <a:ext cx="11274552" cy="1280160"/>
+            <a:endParaRPr lang="en-US" sz="3000" dirty="0"/>
+          </a:p>
+        </p:txBody>
+      </p:sp>
+      <p:sp>
+        <p:nvSpPr>
+          <p:cNvPr id="4" name="Shape 2"/>
+          <p:cNvSpPr/>
+          <p:nvPr/>
+        </p:nvSpPr>
+        <p:spPr>
+          <a:xfrm>
+            <a:off x="566928" y="1243584"/>
+            <a:ext cx="2194560" cy="50292"/>
+          </a:xfrm>
+          <a:prstGeom prst="rect">
+            <a:avLst/>
+          </a:prstGeom>
+          <a:solidFill>
+            <a:srgbClr val="0F2942"/>
+          </a:solidFill>
+          <a:ln/>
+        </p:spPr>
+      </p:sp>
+      <p:sp>
+        <p:nvSpPr>
+          <p:cNvPr id="5" name="Text 3"/>
+          <p:cNvSpPr/>
+          <p:nvPr/>
+        </p:nvSpPr>
+        <p:spPr>
+          <a:xfrm>
+            <a:off x="548640" y="1554480"/>
+            <a:ext cx="11091672" cy="1536192"/>
           </a:xfrm>
           <a:prstGeom prst="rect">
             <a:avLst/>
@@ -2827,14 +3528,20 @@
           <a:bodyPr wrap="square" rtlCol="0" anchor="t"/>
           <a:lstStyle/>
           <a:p>
-            <a:pPr marL="342900" indent="-342900">
+            <a:pPr marL="228600" indent="-228600">
+              <a:lnSpc>
+                <a:spcPct val="105000"/>
+              </a:lnSpc>
+              <a:spcAft>
+                <a:spcPts val="800"/>
+              </a:spcAft>
               <a:buSzPct val="100000"/>
               <a:buChar char="•"/>
             </a:pPr>
             <a:r>
               <a:rPr lang="en-US" sz="1800" dirty="0">
                 <a:solidFill>
-                  <a:srgbClr val="444444"/>
+                  <a:srgbClr val="1E293B"/>
                 </a:solidFill>
                 <a:latin typeface="Arial" pitchFamily="34" charset="0"/>
                 <a:ea typeface="Arial" pitchFamily="34" charset="-122"/>
@@ -2845,14 +3552,20 @@
             <a:endParaRPr lang="en-US" sz="1800" dirty="0"/>
           </a:p>
           <a:p>
-            <a:pPr marL="342900" indent="-342900">
+            <a:pPr marL="228600" indent="-228600">
+              <a:lnSpc>
+                <a:spcPct val="105000"/>
+              </a:lnSpc>
+              <a:spcAft>
+                <a:spcPts val="800"/>
+              </a:spcAft>
               <a:buSzPct val="100000"/>
               <a:buChar char="•"/>
             </a:pPr>
             <a:r>
               <a:rPr lang="en-US" sz="1800" dirty="0">
                 <a:solidFill>
-                  <a:srgbClr val="444444"/>
+                  <a:srgbClr val="1E293B"/>
                 </a:solidFill>
                 <a:latin typeface="Arial" pitchFamily="34" charset="0"/>
                 <a:ea typeface="Arial" pitchFamily="34" charset="-122"/>
@@ -2863,14 +3576,20 @@
             <a:endParaRPr lang="en-US" sz="1800" dirty="0"/>
           </a:p>
           <a:p>
-            <a:pPr marL="342900" indent="-342900">
+            <a:pPr marL="228600" indent="-228600">
+              <a:lnSpc>
+                <a:spcPct val="105000"/>
+              </a:lnSpc>
+              <a:spcAft>
+                <a:spcPts val="800"/>
+              </a:spcAft>
               <a:buSzPct val="100000"/>
               <a:buChar char="•"/>
             </a:pPr>
             <a:r>
               <a:rPr lang="en-US" sz="1800" dirty="0">
                 <a:solidFill>
-                  <a:srgbClr val="444444"/>
+                  <a:srgbClr val="1E293B"/>
                 </a:solidFill>
                 <a:latin typeface="Arial" pitchFamily="34" charset="0"/>
                 <a:ea typeface="Arial" pitchFamily="34" charset="-122"/>
@@ -2881,14 +3600,20 @@
             <a:endParaRPr lang="en-US" sz="1800" dirty="0"/>
           </a:p>
           <a:p>
-            <a:pPr marL="342900" indent="-342900">
+            <a:pPr marL="228600" indent="-228600">
+              <a:lnSpc>
+                <a:spcPct val="105000"/>
+              </a:lnSpc>
+              <a:spcAft>
+                <a:spcPts val="800"/>
+              </a:spcAft>
               <a:buSzPct val="100000"/>
               <a:buChar char="•"/>
             </a:pPr>
             <a:r>
               <a:rPr lang="en-US" sz="1800" dirty="0">
                 <a:solidFill>
-                  <a:srgbClr val="444444"/>
+                  <a:srgbClr val="1E293B"/>
                 </a:solidFill>
                 <a:latin typeface="Arial" pitchFamily="34" charset="0"/>
                 <a:ea typeface="Arial" pitchFamily="34" charset="-122"/>
@@ -2897,6 +3622,45 @@
               <a:t>Allocation of Rights executed pre-award — transition path kept unencumbered</a:t>
             </a:r>
             <a:endParaRPr lang="en-US" sz="1800" dirty="0"/>
+          </a:p>
+        </p:txBody>
+      </p:sp>
+      <p:sp>
+        <p:nvSpPr>
+          <p:cNvPr id="6" name="Text 4"/>
+          <p:cNvSpPr/>
+          <p:nvPr/>
+        </p:nvSpPr>
+        <p:spPr>
+          <a:xfrm>
+            <a:off x="11274552" y="6446520"/>
+            <a:ext cx="548640" cy="274320"/>
+          </a:xfrm>
+          <a:prstGeom prst="rect">
+            <a:avLst/>
+          </a:prstGeom>
+          <a:noFill/>
+          <a:ln/>
+        </p:spPr>
+        <p:txBody>
+          <a:bodyPr wrap="square" rtlCol="0" anchor="ctr"/>
+          <a:lstStyle/>
+          <a:p>
+            <a:pPr algn="r" indent="0" marL="0">
+              <a:buNone/>
+            </a:pPr>
+            <a:r>
+              <a:rPr lang="en-US" sz="1000" dirty="0">
+                <a:solidFill>
+                  <a:srgbClr val="64748B"/>
+                </a:solidFill>
+                <a:latin typeface="Arial" pitchFamily="34" charset="0"/>
+                <a:ea typeface="Arial" pitchFamily="34" charset="-122"/>
+                <a:cs typeface="Arial" pitchFamily="34" charset="-120"/>
+              </a:rPr>
+              <a:t>6</a:t>
+            </a:r>
+            <a:endParaRPr lang="en-US" sz="1000" dirty="0"/>
           </a:p>
         </p:txBody>
       </p:sp>
@@ -2911,6 +3675,13 @@
 <file path=ppt/slides/slide7.xml><?xml version="1.0" encoding="utf-8"?>
 <p:sld xmlns:a="http://schemas.openxmlformats.org/drawingml/2006/main" xmlns:r="http://schemas.openxmlformats.org/officeDocument/2006/relationships" xmlns:p="http://schemas.openxmlformats.org/presentationml/2006/main">
   <p:cSld name="Slide 7">
+    <p:bg>
+      <p:bgPr>
+        <a:solidFill>
+          <a:srgbClr val="FFFFFF"/>
+        </a:solidFill>
+      </p:bgPr>
+    </p:bg>
     <p:spTree>
       <p:nvGrpSpPr>
         <p:cNvPr id="1" name=""/>
@@ -2927,14 +3698,34 @@
       </p:grpSpPr>
       <p:sp>
         <p:nvSpPr>
-          <p:cNvPr id="2" name="Text 0"/>
-          <p:cNvSpPr/>
-          <p:nvPr/>
-        </p:nvSpPr>
-        <p:spPr>
-          <a:xfrm>
-            <a:off x="457200" y="274320"/>
-            <a:ext cx="11274552" cy="914400"/>
+          <p:cNvPr id="2" name="Shape 0"/>
+          <p:cNvSpPr/>
+          <p:nvPr/>
+        </p:nvSpPr>
+        <p:spPr>
+          <a:xfrm>
+            <a:off x="0" y="0"/>
+            <a:ext cx="146304" cy="6858000"/>
+          </a:xfrm>
+          <a:prstGeom prst="rect">
+            <a:avLst/>
+          </a:prstGeom>
+          <a:solidFill>
+            <a:srgbClr val="0F2942"/>
+          </a:solidFill>
+          <a:ln/>
+        </p:spPr>
+      </p:sp>
+      <p:sp>
+        <p:nvSpPr>
+          <p:cNvPr id="3" name="Text 1"/>
+          <p:cNvSpPr/>
+          <p:nvPr/>
+        </p:nvSpPr>
+        <p:spPr>
+          <a:xfrm>
+            <a:off x="548640" y="384048"/>
+            <a:ext cx="11091672" cy="822960"/>
           </a:xfrm>
           <a:prstGeom prst="rect">
             <a:avLst/>
@@ -2950,9 +3741,9 @@
               <a:buNone/>
             </a:pPr>
             <a:r>
-              <a:rPr lang="en-US" sz="2800" b="1" dirty="0">
-                <a:solidFill>
-                  <a:srgbClr val="333333"/>
+              <a:rPr lang="en-US" sz="3000" b="1" dirty="0">
+                <a:solidFill>
+                  <a:srgbClr val="0F2942"/>
                 </a:solidFill>
                 <a:latin typeface="Arial" pitchFamily="34" charset="0"/>
                 <a:ea typeface="Arial" pitchFamily="34" charset="-122"/>
@@ -2960,20 +3751,40 @@
               </a:rPr>
               <a:t>Facilities &amp; Capabilities</a:t>
             </a:r>
-            <a:endParaRPr lang="en-US" sz="2800" dirty="0"/>
-          </a:p>
-        </p:txBody>
-      </p:sp>
-      <p:sp>
-        <p:nvSpPr>
-          <p:cNvPr id="3" name="Text 1"/>
-          <p:cNvSpPr/>
-          <p:nvPr/>
-        </p:nvSpPr>
-        <p:spPr>
-          <a:xfrm>
-            <a:off x="457200" y="1371600"/>
-            <a:ext cx="11274552" cy="960120"/>
+            <a:endParaRPr lang="en-US" sz="3000" dirty="0"/>
+          </a:p>
+        </p:txBody>
+      </p:sp>
+      <p:sp>
+        <p:nvSpPr>
+          <p:cNvPr id="4" name="Shape 2"/>
+          <p:cNvSpPr/>
+          <p:nvPr/>
+        </p:nvSpPr>
+        <p:spPr>
+          <a:xfrm>
+            <a:off x="566928" y="1243584"/>
+            <a:ext cx="2194560" cy="50292"/>
+          </a:xfrm>
+          <a:prstGeom prst="rect">
+            <a:avLst/>
+          </a:prstGeom>
+          <a:solidFill>
+            <a:srgbClr val="0F2942"/>
+          </a:solidFill>
+          <a:ln/>
+        </p:spPr>
+      </p:sp>
+      <p:sp>
+        <p:nvSpPr>
+          <p:cNvPr id="5" name="Text 3"/>
+          <p:cNvSpPr/>
+          <p:nvPr/>
+        </p:nvSpPr>
+        <p:spPr>
+          <a:xfrm>
+            <a:off x="548640" y="1554480"/>
+            <a:ext cx="11091672" cy="1152144"/>
           </a:xfrm>
           <a:prstGeom prst="rect">
             <a:avLst/>
@@ -2985,14 +3796,20 @@
           <a:bodyPr wrap="square" rtlCol="0" anchor="t"/>
           <a:lstStyle/>
           <a:p>
-            <a:pPr marL="342900" indent="-342900">
+            <a:pPr marL="228600" indent="-228600">
+              <a:lnSpc>
+                <a:spcPct val="105000"/>
+              </a:lnSpc>
+              <a:spcAft>
+                <a:spcPts val="800"/>
+              </a:spcAft>
               <a:buSzPct val="100000"/>
               <a:buChar char="•"/>
             </a:pPr>
             <a:r>
               <a:rPr lang="en-US" sz="1800" dirty="0">
                 <a:solidFill>
-                  <a:srgbClr val="444444"/>
+                  <a:srgbClr val="1E293B"/>
                 </a:solidFill>
                 <a:latin typeface="Arial" pitchFamily="34" charset="0"/>
                 <a:ea typeface="Arial" pitchFamily="34" charset="-122"/>
@@ -3003,14 +3820,20 @@
             <a:endParaRPr lang="en-US" sz="1800" dirty="0"/>
           </a:p>
           <a:p>
-            <a:pPr marL="342900" indent="-342900">
+            <a:pPr marL="228600" indent="-228600">
+              <a:lnSpc>
+                <a:spcPct val="105000"/>
+              </a:lnSpc>
+              <a:spcAft>
+                <a:spcPts val="800"/>
+              </a:spcAft>
               <a:buSzPct val="100000"/>
               <a:buChar char="•"/>
             </a:pPr>
             <a:r>
               <a:rPr lang="en-US" sz="1800" dirty="0">
                 <a:solidFill>
-                  <a:srgbClr val="444444"/>
+                  <a:srgbClr val="1E293B"/>
                 </a:solidFill>
                 <a:latin typeface="Arial" pitchFamily="34" charset="0"/>
                 <a:ea typeface="Arial" pitchFamily="34" charset="-122"/>
@@ -3021,14 +3844,20 @@
             <a:endParaRPr lang="en-US" sz="1800" dirty="0"/>
           </a:p>
           <a:p>
-            <a:pPr marL="342900" indent="-342900">
+            <a:pPr marL="228600" indent="-228600">
+              <a:lnSpc>
+                <a:spcPct val="105000"/>
+              </a:lnSpc>
+              <a:spcAft>
+                <a:spcPts val="800"/>
+              </a:spcAft>
               <a:buSzPct val="100000"/>
               <a:buChar char="•"/>
             </a:pPr>
             <a:r>
               <a:rPr lang="en-US" sz="1800" dirty="0">
                 <a:solidFill>
-                  <a:srgbClr val="444444"/>
+                  <a:srgbClr val="1E293B"/>
                 </a:solidFill>
                 <a:latin typeface="Arial" pitchFamily="34" charset="0"/>
                 <a:ea typeface="Arial" pitchFamily="34" charset="-122"/>
@@ -3037,6 +3866,45 @@
               <a:t>Combined stack spans lab bench to at-sea range — no single party could replicate it</a:t>
             </a:r>
             <a:endParaRPr lang="en-US" sz="1800" dirty="0"/>
+          </a:p>
+        </p:txBody>
+      </p:sp>
+      <p:sp>
+        <p:nvSpPr>
+          <p:cNvPr id="6" name="Text 4"/>
+          <p:cNvSpPr/>
+          <p:nvPr/>
+        </p:nvSpPr>
+        <p:spPr>
+          <a:xfrm>
+            <a:off x="11274552" y="6446520"/>
+            <a:ext cx="548640" cy="274320"/>
+          </a:xfrm>
+          <a:prstGeom prst="rect">
+            <a:avLst/>
+          </a:prstGeom>
+          <a:noFill/>
+          <a:ln/>
+        </p:spPr>
+        <p:txBody>
+          <a:bodyPr wrap="square" rtlCol="0" anchor="ctr"/>
+          <a:lstStyle/>
+          <a:p>
+            <a:pPr algn="r" indent="0" marL="0">
+              <a:buNone/>
+            </a:pPr>
+            <a:r>
+              <a:rPr lang="en-US" sz="1000" dirty="0">
+                <a:solidFill>
+                  <a:srgbClr val="64748B"/>
+                </a:solidFill>
+                <a:latin typeface="Arial" pitchFamily="34" charset="0"/>
+                <a:ea typeface="Arial" pitchFamily="34" charset="-122"/>
+                <a:cs typeface="Arial" pitchFamily="34" charset="-120"/>
+              </a:rPr>
+              <a:t>7</a:t>
+            </a:r>
+            <a:endParaRPr lang="en-US" sz="1000" dirty="0"/>
           </a:p>
         </p:txBody>
       </p:sp>
@@ -3051,6 +3919,13 @@
 <file path=ppt/slides/slide8.xml><?xml version="1.0" encoding="utf-8"?>
 <p:sld xmlns:a="http://schemas.openxmlformats.org/drawingml/2006/main" xmlns:r="http://schemas.openxmlformats.org/officeDocument/2006/relationships" xmlns:p="http://schemas.openxmlformats.org/presentationml/2006/main">
   <p:cSld name="Slide 8">
+    <p:bg>
+      <p:bgPr>
+        <a:solidFill>
+          <a:srgbClr val="FFFFFF"/>
+        </a:solidFill>
+      </p:bgPr>
+    </p:bg>
     <p:spTree>
       <p:nvGrpSpPr>
         <p:cNvPr id="1" name=""/>
@@ -3067,14 +3942,34 @@
       </p:grpSpPr>
       <p:sp>
         <p:nvSpPr>
-          <p:cNvPr id="2" name="Text 0"/>
-          <p:cNvSpPr/>
-          <p:nvPr/>
-        </p:nvSpPr>
-        <p:spPr>
-          <a:xfrm>
-            <a:off x="457200" y="274320"/>
-            <a:ext cx="11274552" cy="914400"/>
+          <p:cNvPr id="2" name="Shape 0"/>
+          <p:cNvSpPr/>
+          <p:nvPr/>
+        </p:nvSpPr>
+        <p:spPr>
+          <a:xfrm>
+            <a:off x="0" y="0"/>
+            <a:ext cx="146304" cy="6858000"/>
+          </a:xfrm>
+          <a:prstGeom prst="rect">
+            <a:avLst/>
+          </a:prstGeom>
+          <a:solidFill>
+            <a:srgbClr val="0F2942"/>
+          </a:solidFill>
+          <a:ln/>
+        </p:spPr>
+      </p:sp>
+      <p:sp>
+        <p:nvSpPr>
+          <p:cNvPr id="3" name="Text 1"/>
+          <p:cNvSpPr/>
+          <p:nvPr/>
+        </p:nvSpPr>
+        <p:spPr>
+          <a:xfrm>
+            <a:off x="548640" y="384048"/>
+            <a:ext cx="11091672" cy="822960"/>
           </a:xfrm>
           <a:prstGeom prst="rect">
             <a:avLst/>
@@ -3090,9 +3985,9 @@
               <a:buNone/>
             </a:pPr>
             <a:r>
-              <a:rPr lang="en-US" sz="2800" b="1" dirty="0">
-                <a:solidFill>
-                  <a:srgbClr val="333333"/>
+              <a:rPr lang="en-US" sz="3000" b="1" dirty="0">
+                <a:solidFill>
+                  <a:srgbClr val="0F2942"/>
                 </a:solidFill>
                 <a:latin typeface="Arial" pitchFamily="34" charset="0"/>
                 <a:ea typeface="Arial" pitchFamily="34" charset="-122"/>
@@ -3100,20 +3995,40 @@
               </a:rPr>
               <a:t>Why Aerivio</a:t>
             </a:r>
-            <a:endParaRPr lang="en-US" sz="2800" dirty="0"/>
-          </a:p>
-        </p:txBody>
-      </p:sp>
-      <p:sp>
-        <p:nvSpPr>
-          <p:cNvPr id="3" name="Text 1"/>
-          <p:cNvSpPr/>
-          <p:nvPr/>
-        </p:nvSpPr>
-        <p:spPr>
-          <a:xfrm>
-            <a:off x="457200" y="1371600"/>
-            <a:ext cx="11274552" cy="1280160"/>
+            <a:endParaRPr lang="en-US" sz="3000" dirty="0"/>
+          </a:p>
+        </p:txBody>
+      </p:sp>
+      <p:sp>
+        <p:nvSpPr>
+          <p:cNvPr id="4" name="Shape 2"/>
+          <p:cNvSpPr/>
+          <p:nvPr/>
+        </p:nvSpPr>
+        <p:spPr>
+          <a:xfrm>
+            <a:off x="566928" y="1243584"/>
+            <a:ext cx="2194560" cy="50292"/>
+          </a:xfrm>
+          <a:prstGeom prst="rect">
+            <a:avLst/>
+          </a:prstGeom>
+          <a:solidFill>
+            <a:srgbClr val="0F2942"/>
+          </a:solidFill>
+          <a:ln/>
+        </p:spPr>
+      </p:sp>
+      <p:sp>
+        <p:nvSpPr>
+          <p:cNvPr id="5" name="Text 3"/>
+          <p:cNvSpPr/>
+          <p:nvPr/>
+        </p:nvSpPr>
+        <p:spPr>
+          <a:xfrm>
+            <a:off x="548640" y="1554480"/>
+            <a:ext cx="11091672" cy="1536192"/>
           </a:xfrm>
           <a:prstGeom prst="rect">
             <a:avLst/>
@@ -3125,14 +4040,20 @@
           <a:bodyPr wrap="square" rtlCol="0" anchor="t"/>
           <a:lstStyle/>
           <a:p>
-            <a:pPr marL="342900" indent="-342900">
+            <a:pPr marL="228600" indent="-228600">
+              <a:lnSpc>
+                <a:spcPct val="105000"/>
+              </a:lnSpc>
+              <a:spcAft>
+                <a:spcPts val="800"/>
+              </a:spcAft>
               <a:buSzPct val="100000"/>
               <a:buChar char="•"/>
             </a:pPr>
             <a:r>
               <a:rPr lang="en-US" sz="1800" dirty="0">
                 <a:solidFill>
-                  <a:srgbClr val="444444"/>
+                  <a:srgbClr val="1E293B"/>
                 </a:solidFill>
                 <a:latin typeface="Arial" pitchFamily="34" charset="0"/>
                 <a:ea typeface="Arial" pitchFamily="34" charset="-122"/>
@@ -3143,14 +4064,20 @@
             <a:endParaRPr lang="en-US" sz="1800" dirty="0"/>
           </a:p>
           <a:p>
-            <a:pPr marL="342900" indent="-342900">
+            <a:pPr marL="228600" indent="-228600">
+              <a:lnSpc>
+                <a:spcPct val="105000"/>
+              </a:lnSpc>
+              <a:spcAft>
+                <a:spcPts val="800"/>
+              </a:spcAft>
               <a:buSzPct val="100000"/>
               <a:buChar char="•"/>
             </a:pPr>
             <a:r>
               <a:rPr lang="en-US" sz="1800" dirty="0">
                 <a:solidFill>
-                  <a:srgbClr val="444444"/>
+                  <a:srgbClr val="1E293B"/>
                 </a:solidFill>
                 <a:latin typeface="Arial" pitchFamily="34" charset="0"/>
                 <a:ea typeface="Arial" pitchFamily="34" charset="-122"/>
@@ -3161,14 +4088,20 @@
             <a:endParaRPr lang="en-US" sz="1800" dirty="0"/>
           </a:p>
           <a:p>
-            <a:pPr marL="342900" indent="-342900">
+            <a:pPr marL="228600" indent="-228600">
+              <a:lnSpc>
+                <a:spcPct val="105000"/>
+              </a:lnSpc>
+              <a:spcAft>
+                <a:spcPts val="800"/>
+              </a:spcAft>
               <a:buSzPct val="100000"/>
               <a:buChar char="•"/>
             </a:pPr>
             <a:r>
               <a:rPr lang="en-US" sz="1800" dirty="0">
                 <a:solidFill>
-                  <a:srgbClr val="444444"/>
+                  <a:srgbClr val="1E293B"/>
                 </a:solidFill>
                 <a:latin typeface="Arial" pitchFamily="34" charset="0"/>
                 <a:ea typeface="Arial" pitchFamily="34" charset="-122"/>
@@ -3179,14 +4112,20 @@
             <a:endParaRPr lang="en-US" sz="1800" dirty="0"/>
           </a:p>
           <a:p>
-            <a:pPr marL="342900" indent="-342900">
+            <a:pPr marL="228600" indent="-228600">
+              <a:lnSpc>
+                <a:spcPct val="105000"/>
+              </a:lnSpc>
+              <a:spcAft>
+                <a:spcPts val="800"/>
+              </a:spcAft>
               <a:buSzPct val="100000"/>
               <a:buChar char="•"/>
             </a:pPr>
             <a:r>
               <a:rPr lang="en-US" sz="1800" dirty="0">
                 <a:solidFill>
-                  <a:srgbClr val="444444"/>
+                  <a:srgbClr val="1E293B"/>
                 </a:solidFill>
                 <a:latin typeface="Arial" pitchFamily="34" charset="0"/>
                 <a:ea typeface="Arial" pitchFamily="34" charset="-122"/>
@@ -3198,16 +4137,40 @@
           </a:p>
         </p:txBody>
       </p:sp>
-      <p:sp>
-        <p:nvSpPr>
-          <p:cNvPr id="4" name="Text 2"/>
-          <p:cNvSpPr/>
-          <p:nvPr/>
-        </p:nvSpPr>
-        <p:spPr>
-          <a:xfrm>
-            <a:off x="457200" y="2743200"/>
-            <a:ext cx="11274552" cy="365760"/>
+      <p:pic>
+        <p:nvPicPr>
+          <p:cNvPr id="6" name="Image 0" descr="preencoded.png">    </p:cNvPr>
+          <p:cNvPicPr>
+            <a:picLocks noChangeAspect="1"/>
+          </p:cNvPicPr>
+          <p:nvPr/>
+        </p:nvPicPr>
+        <p:blipFill>
+          <a:blip r:embed="rId1"/>
+          <a:stretch>
+            <a:fillRect/>
+          </a:stretch>
+        </p:blipFill>
+        <p:spPr>
+          <a:xfrm>
+            <a:off x="2985516" y="3200400"/>
+            <a:ext cx="6217920" cy="2826327"/>
+          </a:xfrm>
+          <a:prstGeom prst="rect">
+            <a:avLst/>
+          </a:prstGeom>
+        </p:spPr>
+      </p:pic>
+      <p:sp>
+        <p:nvSpPr>
+          <p:cNvPr id="7" name="Text 4"/>
+          <p:cNvSpPr/>
+          <p:nvPr/>
+        </p:nvSpPr>
+        <p:spPr>
+          <a:xfrm>
+            <a:off x="11274552" y="6446520"/>
+            <a:ext cx="548640" cy="274320"/>
           </a:xfrm>
           <a:prstGeom prst="rect">
             <a:avLst/>
@@ -3219,21 +4182,21 @@
           <a:bodyPr wrap="square" rtlCol="0" anchor="ctr"/>
           <a:lstStyle/>
           <a:p>
-            <a:pPr algn="ctr" indent="0" marL="0">
+            <a:pPr algn="r" indent="0" marL="0">
               <a:buNone/>
             </a:pPr>
             <a:r>
-              <a:rPr lang="en-US" sz="1600" i="1" dirty="0">
-                <a:solidFill>
-                  <a:srgbClr val="999999"/>
-                </a:solidFill>
-                <a:latin typeface="Arial" pitchFamily="34" charset="0"/>
-                <a:ea typeface="Arial" pitchFamily="34" charset="-122"/>
-                <a:cs typeface="Arial" pitchFamily="34" charset="-120"/>
-              </a:rPr>
-              <a:t>[Image: Market growth chart]</a:t>
-            </a:r>
-            <a:endParaRPr lang="en-US" sz="1600" dirty="0"/>
+              <a:rPr lang="en-US" sz="1000" dirty="0">
+                <a:solidFill>
+                  <a:srgbClr val="64748B"/>
+                </a:solidFill>
+                <a:latin typeface="Arial" pitchFamily="34" charset="0"/>
+                <a:ea typeface="Arial" pitchFamily="34" charset="-122"/>
+                <a:cs typeface="Arial" pitchFamily="34" charset="-120"/>
+              </a:rPr>
+              <a:t>8</a:t>
+            </a:r>
+            <a:endParaRPr lang="en-US" sz="1000" dirty="0"/>
           </a:p>
         </p:txBody>
       </p:sp>
@@ -3248,6 +4211,13 @@
 <file path=ppt/slides/slide9.xml><?xml version="1.0" encoding="utf-8"?>
 <p:sld xmlns:a="http://schemas.openxmlformats.org/drawingml/2006/main" xmlns:r="http://schemas.openxmlformats.org/officeDocument/2006/relationships" xmlns:p="http://schemas.openxmlformats.org/presentationml/2006/main">
   <p:cSld name="Slide 9">
+    <p:bg>
+      <p:bgPr>
+        <a:solidFill>
+          <a:srgbClr val="FFFFFF"/>
+        </a:solidFill>
+      </p:bgPr>
+    </p:bg>
     <p:spTree>
       <p:nvGrpSpPr>
         <p:cNvPr id="1" name=""/>
@@ -3264,14 +4234,34 @@
       </p:grpSpPr>
       <p:sp>
         <p:nvSpPr>
-          <p:cNvPr id="2" name="Text 0"/>
-          <p:cNvSpPr/>
-          <p:nvPr/>
-        </p:nvSpPr>
-        <p:spPr>
-          <a:xfrm>
-            <a:off x="457200" y="274320"/>
-            <a:ext cx="11274552" cy="914400"/>
+          <p:cNvPr id="2" name="Shape 0"/>
+          <p:cNvSpPr/>
+          <p:nvPr/>
+        </p:nvSpPr>
+        <p:spPr>
+          <a:xfrm>
+            <a:off x="0" y="0"/>
+            <a:ext cx="146304" cy="6858000"/>
+          </a:xfrm>
+          <a:prstGeom prst="rect">
+            <a:avLst/>
+          </a:prstGeom>
+          <a:solidFill>
+            <a:srgbClr val="0F2942"/>
+          </a:solidFill>
+          <a:ln/>
+        </p:spPr>
+      </p:sp>
+      <p:sp>
+        <p:nvSpPr>
+          <p:cNvPr id="3" name="Text 1"/>
+          <p:cNvSpPr/>
+          <p:nvPr/>
+        </p:nvSpPr>
+        <p:spPr>
+          <a:xfrm>
+            <a:off x="548640" y="384048"/>
+            <a:ext cx="11091672" cy="822960"/>
           </a:xfrm>
           <a:prstGeom prst="rect">
             <a:avLst/>
@@ -3287,9 +4277,9 @@
               <a:buNone/>
             </a:pPr>
             <a:r>
-              <a:rPr lang="en-US" sz="2800" b="1" dirty="0">
-                <a:solidFill>
-                  <a:srgbClr val="333333"/>
+              <a:rPr lang="en-US" sz="3000" b="1" dirty="0">
+                <a:solidFill>
+                  <a:srgbClr val="0F2942"/>
                 </a:solidFill>
                 <a:latin typeface="Arial" pitchFamily="34" charset="0"/>
                 <a:ea typeface="Arial" pitchFamily="34" charset="-122"/>
@@ -3297,20 +4287,40 @@
               </a:rPr>
               <a:t>Transition &amp; Commercialization</a:t>
             </a:r>
-            <a:endParaRPr lang="en-US" sz="2800" dirty="0"/>
-          </a:p>
-        </p:txBody>
-      </p:sp>
-      <p:sp>
-        <p:nvSpPr>
-          <p:cNvPr id="3" name="Text 1"/>
-          <p:cNvSpPr/>
-          <p:nvPr/>
-        </p:nvSpPr>
-        <p:spPr>
-          <a:xfrm>
-            <a:off x="457200" y="1371600"/>
-            <a:ext cx="11274552" cy="1280160"/>
+            <a:endParaRPr lang="en-US" sz="3000" dirty="0"/>
+          </a:p>
+        </p:txBody>
+      </p:sp>
+      <p:sp>
+        <p:nvSpPr>
+          <p:cNvPr id="4" name="Shape 2"/>
+          <p:cNvSpPr/>
+          <p:nvPr/>
+        </p:nvSpPr>
+        <p:spPr>
+          <a:xfrm>
+            <a:off x="566928" y="1243584"/>
+            <a:ext cx="2194560" cy="50292"/>
+          </a:xfrm>
+          <a:prstGeom prst="rect">
+            <a:avLst/>
+          </a:prstGeom>
+          <a:solidFill>
+            <a:srgbClr val="0F2942"/>
+          </a:solidFill>
+          <a:ln/>
+        </p:spPr>
+      </p:sp>
+      <p:sp>
+        <p:nvSpPr>
+          <p:cNvPr id="5" name="Text 3"/>
+          <p:cNvSpPr/>
+          <p:nvPr/>
+        </p:nvSpPr>
+        <p:spPr>
+          <a:xfrm>
+            <a:off x="548640" y="1554480"/>
+            <a:ext cx="11091672" cy="1536192"/>
           </a:xfrm>
           <a:prstGeom prst="rect">
             <a:avLst/>
@@ -3322,7 +4332,13 @@
           <a:bodyPr wrap="square" rtlCol="0" anchor="t"/>
           <a:lstStyle/>
           <a:p>
-            <a:pPr marL="342900" indent="-342900">
+            <a:pPr marL="228600" indent="-228600">
+              <a:lnSpc>
+                <a:spcPct val="105000"/>
+              </a:lnSpc>
+              <a:spcAft>
+                <a:spcPts val="800"/>
+              </a:spcAft>
               <a:buSzPct val="100000"/>
               <a:buFont typeface="+mj-lt"/>
               <a:buAutoNum type="arabicPeriod" startAt="1"/>
@@ -3330,7 +4346,7 @@
             <a:r>
               <a:rPr lang="en-US" sz="1800" dirty="0">
                 <a:solidFill>
-                  <a:srgbClr val="444444"/>
+                  <a:srgbClr val="1E293B"/>
                 </a:solidFill>
                 <a:latin typeface="Arial" pitchFamily="34" charset="0"/>
                 <a:ea typeface="Arial" pitchFamily="34" charset="-122"/>
@@ -3341,7 +4357,13 @@
             <a:endParaRPr lang="en-US" sz="1800" dirty="0"/>
           </a:p>
           <a:p>
-            <a:pPr marL="342900" indent="-342900">
+            <a:pPr marL="228600" indent="-228600">
+              <a:lnSpc>
+                <a:spcPct val="105000"/>
+              </a:lnSpc>
+              <a:spcAft>
+                <a:spcPts val="800"/>
+              </a:spcAft>
               <a:buSzPct val="100000"/>
               <a:buFont typeface="+mj-lt"/>
               <a:buAutoNum type="arabicPeriod" startAt="1"/>
@@ -3349,7 +4371,7 @@
             <a:r>
               <a:rPr lang="en-US" sz="1800" dirty="0">
                 <a:solidFill>
-                  <a:srgbClr val="444444"/>
+                  <a:srgbClr val="1E293B"/>
                 </a:solidFill>
                 <a:latin typeface="Arial" pitchFamily="34" charset="0"/>
                 <a:ea typeface="Arial" pitchFamily="34" charset="-122"/>
@@ -3360,7 +4382,13 @@
             <a:endParaRPr lang="en-US" sz="1800" dirty="0"/>
           </a:p>
           <a:p>
-            <a:pPr marL="342900" indent="-342900">
+            <a:pPr marL="228600" indent="-228600">
+              <a:lnSpc>
+                <a:spcPct val="105000"/>
+              </a:lnSpc>
+              <a:spcAft>
+                <a:spcPts val="800"/>
+              </a:spcAft>
               <a:buSzPct val="100000"/>
               <a:buFont typeface="+mj-lt"/>
               <a:buAutoNum type="arabicPeriod" startAt="1"/>
@@ -3368,7 +4396,7 @@
             <a:r>
               <a:rPr lang="en-US" sz="1800" dirty="0">
                 <a:solidFill>
-                  <a:srgbClr val="444444"/>
+                  <a:srgbClr val="1E293B"/>
                 </a:solidFill>
                 <a:latin typeface="Arial" pitchFamily="34" charset="0"/>
                 <a:ea typeface="Arial" pitchFamily="34" charset="-122"/>
@@ -3379,7 +4407,13 @@
             <a:endParaRPr lang="en-US" sz="1800" dirty="0"/>
           </a:p>
           <a:p>
-            <a:pPr marL="342900" indent="-342900">
+            <a:pPr marL="228600" indent="-228600">
+              <a:lnSpc>
+                <a:spcPct val="105000"/>
+              </a:lnSpc>
+              <a:spcAft>
+                <a:spcPts val="800"/>
+              </a:spcAft>
               <a:buSzPct val="100000"/>
               <a:buFont typeface="+mj-lt"/>
               <a:buAutoNum type="arabicPeriod" startAt="1"/>
@@ -3387,7 +4421,7 @@
             <a:r>
               <a:rPr lang="en-US" sz="1800" dirty="0">
                 <a:solidFill>
-                  <a:srgbClr val="444444"/>
+                  <a:srgbClr val="1E293B"/>
                 </a:solidFill>
                 <a:latin typeface="Arial" pitchFamily="34" charset="0"/>
                 <a:ea typeface="Arial" pitchFamily="34" charset="-122"/>
@@ -3396,6 +4430,45 @@
               <a:t>Commercial: port &amp; offshore-energy maritime domain awareness (dual-use)</a:t>
             </a:r>
             <a:endParaRPr lang="en-US" sz="1800" dirty="0"/>
+          </a:p>
+        </p:txBody>
+      </p:sp>
+      <p:sp>
+        <p:nvSpPr>
+          <p:cNvPr id="6" name="Text 4"/>
+          <p:cNvSpPr/>
+          <p:nvPr/>
+        </p:nvSpPr>
+        <p:spPr>
+          <a:xfrm>
+            <a:off x="11274552" y="6446520"/>
+            <a:ext cx="548640" cy="274320"/>
+          </a:xfrm>
+          <a:prstGeom prst="rect">
+            <a:avLst/>
+          </a:prstGeom>
+          <a:noFill/>
+          <a:ln/>
+        </p:spPr>
+        <p:txBody>
+          <a:bodyPr wrap="square" rtlCol="0" anchor="ctr"/>
+          <a:lstStyle/>
+          <a:p>
+            <a:pPr algn="r" indent="0" marL="0">
+              <a:buNone/>
+            </a:pPr>
+            <a:r>
+              <a:rPr lang="en-US" sz="1000" dirty="0">
+                <a:solidFill>
+                  <a:srgbClr val="64748B"/>
+                </a:solidFill>
+                <a:latin typeface="Arial" pitchFamily="34" charset="0"/>
+                <a:ea typeface="Arial" pitchFamily="34" charset="-122"/>
+                <a:cs typeface="Arial" pitchFamily="34" charset="-120"/>
+              </a:rPr>
+              <a:t>9</a:t>
+            </a:r>
+            <a:endParaRPr lang="en-US" sz="1000" dirty="0"/>
           </a:p>
         </p:txBody>
       </p:sp>
